--- a/lecons/F2T/11_S05_L3_P1_Desert_Location_Types.pptx
+++ b/lecons/F2T/11_S05_L3_P1_Desert_Location_Types.pptx
@@ -59,9 +59,10 @@
     <p:sldId id="307" r:id="rId53"/>
     <p:sldId id="308" r:id="rId54"/>
     <p:sldId id="309" r:id="rId55"/>
+    <p:sldId id="310" r:id="rId56"/>
   </p:sldIdLst>
   <p:notesMasterIdLst>
-    <p:notesMasterId r:id="rId56"/>
+    <p:notesMasterId r:id="rId57"/>
   </p:notesMasterIdLst>
   <p:sldSz cx="12192000" cy="6858000"/>
   <p:notesSz cx="6858000" cy="12192000"/>
@@ -643,7 +644,7 @@
           <a:p>
             <a:r>
               <a:rPr lang="en-US" dirty="0"/>
-              <a:t>Listen carefully to this situation from real life. In Garoua, Salma watches a film about the Sahara. She is surprised: the desert is not only sand. There are also plains of stones and bare rocky mountains. Think about it, because I am going to ask you some questions.</a:t>
+              <a:t>Listen carefully to this situation from real life. In Garoua, Salma watches a film about the Sahara. She is surprised: the desert is not only sand, but also plains of stones and bare rocky mountains. Salma asks: "Where are the deserts of the world, what types are there, and why are they so dry?" Think about it, because I am going to ask you some questions.</a:t>
             </a:r>
             <a:endParaRPr lang="en-US" dirty="0"/>
           </a:p>
@@ -819,7 +820,7 @@
           <a:p>
             <a:r>
               <a:rPr lang="en-US" dirty="0"/>
-              <a:t>Good. Salma thought that the desert was only sand.</a:t>
+              <a:t>Good. Salma does not know where deserts are, their types and why they are dry.</a:t>
             </a:r>
             <a:endParaRPr lang="en-US" dirty="0"/>
           </a:p>
@@ -907,7 +908,7 @@
           <a:p>
             <a:r>
               <a:rPr lang="en-US" dirty="0"/>
-              <a:t>Question 2: What did she see in the film? Think for a moment, then raise your hand to answer.</a:t>
+              <a:t>Question 2: What did Salma expect to see? Think for a moment, then raise your hand to answer.</a:t>
             </a:r>
             <a:endParaRPr lang="en-US" dirty="0"/>
           </a:p>
@@ -995,7 +996,7 @@
           <a:p>
             <a:r>
               <a:rPr lang="en-US" dirty="0"/>
-              <a:t>Good. Sand, plains of stones and rocky mountains.</a:t>
+              <a:t>Good. Only sand.</a:t>
             </a:r>
             <a:endParaRPr lang="en-US" dirty="0"/>
           </a:p>
@@ -1083,7 +1084,7 @@
           <a:p>
             <a:r>
               <a:rPr lang="en-US" dirty="0"/>
-              <a:t>Question 3: Where can she learn more about deserts? Think for a moment, then raise your hand to answer.</a:t>
+              <a:t>Question 3: What else did she see? Think for a moment, then raise your hand to answer.</a:t>
             </a:r>
             <a:endParaRPr lang="en-US" dirty="0"/>
           </a:p>
@@ -1171,7 +1172,7 @@
           <a:p>
             <a:r>
               <a:rPr lang="en-US" dirty="0"/>
-              <a:t>Good. In her atlas, her textbook and in this lesson.</a:t>
+              <a:t>Good. Plains of stones and bare rocky mountains.</a:t>
             </a:r>
             <a:endParaRPr lang="en-US" dirty="0"/>
           </a:p>
@@ -1435,7 +1436,7 @@
           <a:p>
             <a:r>
               <a:rPr lang="en-US" dirty="0"/>
-              <a:t>Activity 1. Look carefully at this picture: sand dunes in the Sahara. Observe every detail before I ask the question.</a:t>
+              <a:t>Activity 1. Look carefully at this diagram: the hot deserts of the world. Observe every detail before I ask the question.</a:t>
             </a:r>
             <a:endParaRPr lang="en-US" dirty="0"/>
           </a:p>
@@ -1611,7 +1612,7 @@
           <a:p>
             <a:r>
               <a:rPr lang="en-US" dirty="0"/>
-              <a:t>Here is the question for Activity 1: This region gets less than 250 mm of rain per year. What do we call it? Take one minute to think and write your answer in your rough notebook.</a:t>
+              <a:t>Here is the question for Activity 1: Near which lines are most hot deserts found? Take one minute to think and write your answer in your rough notebook.</a:t>
             </a:r>
             <a:endParaRPr lang="en-US" dirty="0"/>
           </a:p>
@@ -1699,7 +1700,7 @@
           <a:p>
             <a:r>
               <a:rPr lang="en-US" dirty="0"/>
-              <a:t>Let us check the answer together. A desert.</a:t>
+              <a:t>Let us check the answer together. Near the Tropic of Cancer and the Tropic of Capricorn.</a:t>
             </a:r>
             <a:endParaRPr lang="en-US" dirty="0"/>
           </a:p>
@@ -1787,7 +1788,7 @@
           <a:p>
             <a:r>
               <a:rPr lang="en-US" dirty="0"/>
-              <a:t>Activity 2. Look carefully at this diagram: the main hot deserts of the world. Observe every detail before I ask the question.</a:t>
+              <a:t>Activity 2. Look carefully at this picture: a sandy desert. Observe every detail before I ask the question.</a:t>
             </a:r>
             <a:endParaRPr lang="en-US" dirty="0"/>
           </a:p>
@@ -1875,7 +1876,7 @@
           <a:p>
             <a:r>
               <a:rPr lang="en-US" dirty="0"/>
-              <a:t>Here is the question for Activity 2: Near which lines are most hot deserts found? Take one minute to think and write your answer in your rough notebook.</a:t>
+              <a:t>Here is the question for Activity 2: What is a desert of sand dunes called? Take one minute to think and write your answer in your rough notebook.</a:t>
             </a:r>
             <a:endParaRPr lang="en-US" dirty="0"/>
           </a:p>
@@ -1963,7 +1964,7 @@
           <a:p>
             <a:r>
               <a:rPr lang="en-US" dirty="0"/>
-              <a:t>Let us check the answer together. Near the Tropic of Cancer and the Tropic of Capricorn.</a:t>
+              <a:t>Let us check the answer together. A sandy desert (erg).</a:t>
             </a:r>
             <a:endParaRPr lang="en-US" dirty="0"/>
           </a:p>
@@ -2051,7 +2052,7 @@
           <a:p>
             <a:r>
               <a:rPr lang="en-US" dirty="0"/>
-              <a:t>Activity 3. Look carefully at this picture: a desert covered with small stones. Observe every detail before I ask the question.</a:t>
+              <a:t>Activity 3. Look carefully at this picture: a desert of stones. Observe every detail before I ask the question.</a:t>
             </a:r>
             <a:endParaRPr lang="en-US" dirty="0"/>
           </a:p>
@@ -2139,7 +2140,7 @@
           <a:p>
             <a:r>
               <a:rPr lang="en-US" dirty="0"/>
-              <a:t>Here is the question for Activity 3: Is this desert made of sand? What is it made of? Take one minute to think and write your answer in your rough notebook.</a:t>
+              <a:t>Here is the question for Activity 3: What is this desert made of? Take one minute to think and write your answer in your rough notebook.</a:t>
             </a:r>
             <a:endParaRPr lang="en-US" dirty="0"/>
           </a:p>
@@ -2227,7 +2228,7 @@
           <a:p>
             <a:r>
               <a:rPr lang="en-US" dirty="0"/>
-              <a:t>Let us check the answer together. No. It is made of stones: it is a stony desert (reg).</a:t>
+              <a:t>Let us check the answer together. Stones: it is a stony desert (reg).</a:t>
             </a:r>
             <a:endParaRPr lang="en-US" dirty="0"/>
           </a:p>
@@ -2403,7 +2404,7 @@
           <a:p>
             <a:r>
               <a:rPr lang="en-US" dirty="0"/>
-              <a:t>Here is the question for Activity 4: This desert is made of bare rock. What do we call it? Take one minute to think and write your answer in your rough notebook.</a:t>
+              <a:t>Here is the question for Activity 4: What do we call a desert of bare rock? Take one minute to think and write your answer in your rough notebook.</a:t>
             </a:r>
             <a:endParaRPr lang="en-US" dirty="0"/>
           </a:p>
@@ -2667,7 +2668,7 @@
           <a:p>
             <a:r>
               <a:rPr lang="en-US" dirty="0"/>
-              <a:t>Activity 5. Look carefully at this picture: the wind comes from the land, not from the sea. Observe every detail before I ask the question.</a:t>
+              <a:t>Activity 5. Look carefully at this picture: a wind that blows from the land. Observe every detail before I ask the question.</a:t>
             </a:r>
             <a:endParaRPr lang="en-US" dirty="0"/>
           </a:p>
@@ -2843,7 +2844,7 @@
           <a:p>
             <a:r>
               <a:rPr lang="en-US" dirty="0"/>
-              <a:t>Let us check the answer together. It comes from the land, so it is dry. There are no clouds.</a:t>
+              <a:t>Let us check the answer together. It comes from the land, so it is dry.</a:t>
             </a:r>
             <a:endParaRPr lang="en-US" dirty="0"/>
           </a:p>
@@ -3019,7 +3020,7 @@
           <a:p>
             <a:r>
               <a:rPr lang="en-US" dirty="0"/>
-              <a:t>Let us copy Meaning. A desert is defined as follows. On this slide we have Desert. Write each point on a new line, with the key term first, and explain it in your own words when we revise.</a:t>
+              <a:t>Let us copy the definitions. The key terms of this lesson are defined as follows. On this slide we have Desert. Write each point on a new line, with the key term first, and explain it in your own words when we revise.</a:t>
             </a:r>
             <a:endParaRPr lang="en-US" dirty="0"/>
           </a:p>
@@ -3107,7 +3108,7 @@
           <a:p>
             <a:r>
               <a:rPr lang="en-US" dirty="0"/>
-              <a:t>Let us copy Location. Hot deserts are found near the tropics on the following continents. On this slide we have Africa and Asia. Write each point on a new line, with the key term first, and explain it in your own words when we revise. When you finish, we go to the next slide.</a:t>
+              <a:t>Let us copy Location. Hot deserts are found near the tropics. Copy the point on Africa on the left, then draw the diagram on the right: the hot deserts of the world. Give it a title and label it clearly.</a:t>
             </a:r>
             <a:endParaRPr lang="en-US" dirty="0"/>
           </a:p>
@@ -3195,7 +3196,7 @@
           <a:p>
             <a:r>
               <a:rPr lang="en-US" dirty="0"/>
-              <a:t>We continue with Location. On this slide we have America and Australia. Write each point on a new line, with the key term first, and explain it in your own words when we revise.</a:t>
+              <a:t>We continue with Location. On this slide we have Asia, America and Australia. Write each point on a new line, with the key term first, and explain it in your own words when we revise.</a:t>
             </a:r>
             <a:endParaRPr lang="en-US" dirty="0"/>
           </a:p>
@@ -3283,7 +3284,7 @@
           <a:p>
             <a:r>
               <a:rPr lang="en-US" dirty="0"/>
-              <a:t>Now draw this illustration in your notebook: hot deserts of the world. Give it a title and label it clearly.</a:t>
+              <a:t>Let us copy Types of Deserts. There are the following types of deserts. On this slide we have Hot deserts and Cold deserts. Write each point on a new line, with the key term first, and explain it in your own words when we revise.</a:t>
             </a:r>
             <a:endParaRPr lang="en-US" dirty="0"/>
           </a:p>
@@ -3371,7 +3372,7 @@
           <a:p>
             <a:r>
               <a:rPr lang="en-US" dirty="0"/>
-              <a:t>Let us copy Types of Deserts. Deserts are classified in the following ways. On this slide we have By temperature and Erg. Write each point on a new line, with the key term first, and explain it in your own words when we revise. When you finish, we go to the next slide.</a:t>
+              <a:t>Copy the point on Sandy desert (erg) on the left, then draw the diagram on the right: a sandy desert. Give it a title and label it clearly.</a:t>
             </a:r>
             <a:endParaRPr lang="en-US" dirty="0"/>
           </a:p>
@@ -3547,7 +3548,7 @@
           <a:p>
             <a:r>
               <a:rPr lang="en-US" dirty="0"/>
-              <a:t>We continue with Types of Deserts. On this slide we have Reg and Hamada. Write each point on a new line, with the key term first, and explain it in your own words when we revise.</a:t>
+              <a:t>Copy the point on Stony desert (reg) on the left, then draw the diagram on the right: a stony desert. Give it a title and label it clearly.</a:t>
             </a:r>
             <a:endParaRPr lang="en-US" dirty="0"/>
           </a:p>
@@ -3635,7 +3636,7 @@
           <a:p>
             <a:r>
               <a:rPr lang="en-US" dirty="0"/>
-              <a:t>Let us copy Causes of Deserts. Deserts are dry for the following reasons. On this slide we have Dry winds and Cold ocean currents. Write each point on a new line, with the key term first, and explain it in your own words when we revise. When you finish, we go to the next slide.</a:t>
+              <a:t>We continue with Types of Deserts. On this slide we have Rocky desert (hamada). Write each point on a new line, with the key term first, and explain it in your own words when we revise.</a:t>
             </a:r>
             <a:endParaRPr lang="en-US" dirty="0"/>
           </a:p>
@@ -3723,7 +3724,7 @@
           <a:p>
             <a:r>
               <a:rPr lang="en-US" dirty="0"/>
-              <a:t>We continue with Causes of Deserts. On this slide we have Distance from the sea and Mountains. Write each point on a new line, with the key term first, and explain it in your own words when we revise.</a:t>
+              <a:t>Let us copy Characteristics and Causes. Deserts are dry for the following reasons. Copy the point on Dry winds on the left, then draw the diagram on the right: a dry wind from the land. Give it a title and label it clearly.</a:t>
             </a:r>
             <a:endParaRPr lang="en-US" dirty="0"/>
           </a:p>
@@ -3811,7 +3812,7 @@
           <a:p>
             <a:r>
               <a:rPr lang="en-US" dirty="0"/>
-              <a:t>Now let us check what you have understood. Question 1: What is a desert? Answer in your exercise book.</a:t>
+              <a:t>We continue with Characteristics and Causes. On this slide we have High pressure, Cold currents and Distance from the sea. Write each point on a new line, with the key term first, and explain it in your own words when we revise.</a:t>
             </a:r>
             <a:endParaRPr lang="en-US" dirty="0"/>
           </a:p>
@@ -3899,7 +3900,7 @@
           <a:p>
             <a:r>
               <a:rPr lang="en-US" dirty="0"/>
-              <a:t>The expected answer is: a region with less than 250 mm of rain per year and very few plants. If you got it right, well done.</a:t>
+              <a:t>Now let us check what you have understood. Question 1: What is a desert? Answer in your exercise book.</a:t>
             </a:r>
             <a:endParaRPr lang="en-US" dirty="0"/>
           </a:p>
@@ -3987,7 +3988,7 @@
           <a:p>
             <a:r>
               <a:rPr lang="en-US" dirty="0"/>
-              <a:t>Now let us check what you have understood. Question 2: Name the three types of desert surface. Answer in your exercise book.</a:t>
+              <a:t>The expected answer is: a region with less than 250 mm of rain per year and very few plants. If you got it right, well done.</a:t>
             </a:r>
             <a:endParaRPr lang="en-US" dirty="0"/>
           </a:p>
@@ -4075,7 +4076,7 @@
           <a:p>
             <a:r>
               <a:rPr lang="en-US" dirty="0"/>
-              <a:t>The expected answer is: sandy (erg), stony (reg) and rocky (hamada). If you got it right, well done.</a:t>
+              <a:t>Now let us check what you have understood. Question 2: Name the three types of desert surface. Answer in your exercise book.</a:t>
             </a:r>
             <a:endParaRPr lang="en-US" dirty="0"/>
           </a:p>
@@ -4163,7 +4164,7 @@
           <a:p>
             <a:r>
               <a:rPr lang="en-US" dirty="0"/>
-              <a:t>For those who need more practice, fill in the blanks in your exercise book. The answers are: number 1, erg; number 2, reg; number 3, Sahara.</a:t>
+              <a:t>The expected answer is: sandy (erg), stony (reg) and rocky (hamada). If you got it right, well done.</a:t>
             </a:r>
             <a:endParaRPr lang="en-US" dirty="0"/>
           </a:p>
@@ -4251,7 +4252,7 @@
           <a:p>
             <a:r>
               <a:rPr lang="en-US" dirty="0"/>
-              <a:t>For your homework: Think about the hottest days of March in Garoua. Are the nights also very hot, or cooler? Write two sentences about the difference between day and night. We shall correct it at the beginning of our next lesson.</a:t>
+              <a:t>For those who need more practice, fill in the blanks in your exercise book. The answers are: number 1, erg; number 2, reg; number 3, Sahara.</a:t>
             </a:r>
             <a:endParaRPr lang="en-US" dirty="0"/>
           </a:p>
@@ -4339,7 +4340,7 @@
           <a:p>
             <a:r>
               <a:rPr lang="en-US" dirty="0"/>
-              <a:t>Our next lesson will be on Lesson 3 (Part 2): The Desert Regions: Characteristics (Climate). Thank you for your attention, and see you next time.</a:t>
+              <a:t>For your homework: Think about the hottest days of March in Garoua. Are the nights also very hot, or cooler? Write two sentences about the difference between day and night. We shall correct it at the beginning of our next lesson.</a:t>
             </a:r>
             <a:endParaRPr lang="en-US" dirty="0"/>
           </a:p>
@@ -4515,7 +4516,7 @@
           <a:p>
             <a:r>
               <a:rPr lang="en-US" dirty="0"/>
-              <a:t>Let us play the bilingual game. I say a word in English, and you give me the French word. Then we do the reverse.</a:t>
+              <a:t>Our next lesson will be on Lesson 3 (Part 2): The Desert Regions: Characteristics (Climate). Thank you for your attention, and see you next time.</a:t>
             </a:r>
             <a:endParaRPr lang="en-US" dirty="0"/>
           </a:p>
@@ -4603,7 +4604,7 @@
           <a:p>
             <a:r>
               <a:rPr lang="en-US" dirty="0"/>
-              <a:t>I record this information in the official logbook of the class after the lesson.</a:t>
+              <a:t>Let us play the bilingual game. I say a word in English, and you give me the French word. Then we do the reverse.</a:t>
             </a:r>
             <a:endParaRPr lang="en-US" dirty="0"/>
           </a:p>
@@ -4691,7 +4692,7 @@
           <a:p>
             <a:r>
               <a:rPr lang="en-US" dirty="0"/>
-              <a:t>I complete the second page of the logbook: the matter taught, the evaluation, the homework and the attendance.</a:t>
+              <a:t>I record this information in the official logbook of the class after the lesson.</a:t>
             </a:r>
             <a:endParaRPr lang="en-US" dirty="0"/>
           </a:p>
@@ -4779,7 +4780,7 @@
           <a:p>
             <a:r>
               <a:rPr lang="en-US" dirty="0"/>
-              <a:t>This slide is for me, the teacher: it gives the timing of the lesson and what to do if the projector is not available.</a:t>
+              <a:t>I complete the second page of the logbook: the matter taught, the evaluation, the homework and the attendance.</a:t>
             </a:r>
             <a:endParaRPr lang="en-US" dirty="0"/>
           </a:p>
@@ -4867,7 +4868,7 @@
           <a:p>
             <a:r>
               <a:rPr lang="en-US" dirty="0"/>
-              <a:t>These are the references and picture credits used to prepare this lesson.</a:t>
+              <a:t>This slide is for me, the teacher: it gives the timing of the lesson and what to do if the projector is not available.</a:t>
             </a:r>
             <a:endParaRPr lang="en-US" dirty="0"/>
           </a:p>
@@ -4891,6 +4892,94 @@
             <a:fld id="{F7021451-1387-4CA6-816F-3879F97B5CBC}" type="slidenum">
               <a:rPr lang="en-US"/>
               <a:t>54</a:t>
+            </a:fld>
+            <a:endParaRPr lang="en-US"/>
+          </a:p>
+        </p:txBody>
+      </p:sp>
+    </p:spTree>
+    <p:extLst>
+      <p:ext uri="{BB962C8B-B14F-4D97-AF65-F5344CB8AC3E}">
+        <p14:creationId xmlns:p14="http://schemas.microsoft.com/office/powerpoint/2010/main" val="1024086991"/>
+      </p:ext>
+    </p:extLst>
+  </p:cSld>
+  <p:clrMapOvr>
+    <a:masterClrMapping/>
+  </p:clrMapOvr>
+</p:notes>
+</file>
+
+<file path=ppt/notesSlides/notesSlide55.xml><?xml version="1.0" encoding="utf-8"?>
+<p:notes xmlns:a="http://schemas.openxmlformats.org/drawingml/2006/main" xmlns:r="http://schemas.openxmlformats.org/officeDocument/2006/relationships" xmlns:p="http://schemas.openxmlformats.org/presentationml/2006/main">
+  <p:cSld>
+    <p:spTree>
+      <p:nvGrpSpPr>
+        <p:cNvPr id="1" name=""/>
+        <p:cNvGrpSpPr/>
+        <p:nvPr/>
+      </p:nvGrpSpPr>
+      <p:grpSpPr>
+        <a:xfrm>
+          <a:off x="0" y="0"/>
+          <a:ext cx="0" cy="0"/>
+          <a:chOff x="0" y="0"/>
+          <a:chExt cx="0" cy="0"/>
+        </a:xfrm>
+      </p:grpSpPr>
+      <p:sp>
+        <p:nvSpPr>
+          <p:cNvPr id="2" name="Slide Image Placeholder 1"/>
+          <p:cNvSpPr>
+            <a:spLocks noGrp="1" noRot="1" noChangeAspect="1"/>
+          </p:cNvSpPr>
+          <p:nvPr>
+            <p:ph type="sldImg"/>
+          </p:nvPr>
+        </p:nvSpPr>
+        <p:spPr/>
+      </p:sp>
+      <p:sp>
+        <p:nvSpPr>
+          <p:cNvPr id="3" name="Notes Placeholder 2"/>
+          <p:cNvSpPr>
+            <a:spLocks noGrp="1"/>
+          </p:cNvSpPr>
+          <p:nvPr>
+            <p:ph type="body" idx="1"/>
+          </p:nvPr>
+        </p:nvSpPr>
+        <p:spPr/>
+        <p:txBody>
+          <a:bodyPr/>
+          <a:lstStyle/>
+          <a:p>
+            <a:r>
+              <a:rPr lang="en-US" dirty="0"/>
+              <a:t>These are the references and picture credits used to prepare this lesson.</a:t>
+            </a:r>
+            <a:endParaRPr lang="en-US" dirty="0"/>
+          </a:p>
+        </p:txBody>
+      </p:sp>
+      <p:sp>
+        <p:nvSpPr>
+          <p:cNvPr id="4" name="Slide Number Placeholder 3"/>
+          <p:cNvSpPr>
+            <a:spLocks noGrp="1"/>
+          </p:cNvSpPr>
+          <p:nvPr>
+            <p:ph type="sldNum" sz="quarter" idx="10"/>
+          </p:nvPr>
+        </p:nvSpPr>
+        <p:spPr/>
+        <p:txBody>
+          <a:bodyPr/>
+          <a:lstStyle/>
+          <a:p>
+            <a:fld id="{F7021451-1387-4CA6-816F-3879F97B5CBC}" type="slidenum">
+              <a:rPr lang="en-US"/>
+              <a:t>55</a:t>
             </a:fld>
             <a:endParaRPr lang="en-US"/>
           </a:p>
@@ -5131,7 +5220,7 @@
           <a:p>
             <a:r>
               <a:rPr lang="en-US" dirty="0"/>
-              <a:t>By the end of this lesson, you should be able to do three things. Number 1: define a desert. Number 2: locate the main deserts of the world. Number 3: distinguish between hot and cold deserts, and between sandy, stony and rocky deserts. Number 4: explain the causes of deserts.</a:t>
+              <a:t>By the end of this lesson, you should be able to do four things. Number 1: define a desert. Number 2: locate the main deserts of the world. Number 3: distinguish between hot and cold deserts, and between sandy, stony and rocky deserts. Number 4: explain the causes of deserts.</a:t>
             </a:r>
             <a:endParaRPr lang="en-US" dirty="0"/>
           </a:p>
@@ -6599,7 +6688,7 @@
         <p:spPr>
           <a:xfrm>
             <a:off x="0" y="658368"/>
-            <a:ext cx="5120640" cy="5833872"/>
+            <a:ext cx="2468880" cy="5833872"/>
           </a:xfrm>
           <a:prstGeom prst="rect">
             <a:avLst/>
@@ -6614,8 +6703,8 @@
         </p:nvSpPr>
         <p:spPr>
           <a:xfrm>
-            <a:off x="5349240" y="1005840"/>
-            <a:ext cx="6522415" cy="731520"/>
+            <a:off x="2697480" y="1005840"/>
+            <a:ext cx="9174175" cy="731520"/>
           </a:xfrm>
           <a:prstGeom prst="rect">
             <a:avLst/>
@@ -6655,8 +6744,8 @@
         </p:nvSpPr>
         <p:spPr>
           <a:xfrm>
-            <a:off x="5349240" y="1783080"/>
-            <a:ext cx="6522415" cy="4663440"/>
+            <a:off x="2697480" y="1783080"/>
+            <a:ext cx="9174175" cy="4663440"/>
           </a:xfrm>
           <a:prstGeom prst="rect">
             <a:avLst/>
@@ -6683,7 +6772,7 @@
                 <a:ea typeface="Times New Roman" pitchFamily="34" charset="-122"/>
                 <a:cs typeface="Times New Roman" pitchFamily="34" charset="-120"/>
               </a:rPr>
-              <a:t>In Garoua, Salma watches a film about the Sahara. She is surprised: the desert is not only sand. There are also plains of stones and bare rocky mountains.</a:t>
+              <a:t>In Garoua, Salma watches a film about the Sahara. She is surprised: the desert is not only sand, but also plains of stones and bare rocky mountains. Salma asks: "Where are the deserts of the world, what types are there, and why are they so dry?"</a:t>
             </a:r>
             <a:endParaRPr lang="en-US" sz="4000" dirty="0"/>
           </a:p>
@@ -7121,7 +7210,7 @@
                 <a:ea typeface="Times New Roman" pitchFamily="34" charset="-122"/>
                 <a:cs typeface="Times New Roman" pitchFamily="34" charset="-120"/>
               </a:rPr>
-              <a:t>Salma thought that the desert was only sand.</a:t>
+              <a:t>Salma does not know where deserts are, their types and why they are dry.</a:t>
             </a:r>
             <a:endParaRPr lang="en-US" sz="4000" dirty="0"/>
           </a:p>
@@ -7340,7 +7429,7 @@
                 <a:ea typeface="Times New Roman" pitchFamily="34" charset="-122"/>
                 <a:cs typeface="Times New Roman" pitchFamily="34" charset="-120"/>
               </a:rPr>
-              <a:t>What did she see in the film?</a:t>
+              <a:t>What did Salma expect to see?</a:t>
             </a:r>
             <a:endParaRPr lang="en-US" sz="4000" dirty="0"/>
           </a:p>
@@ -7559,7 +7648,7 @@
                 <a:ea typeface="Times New Roman" pitchFamily="34" charset="-122"/>
                 <a:cs typeface="Times New Roman" pitchFamily="34" charset="-120"/>
               </a:rPr>
-              <a:t>Sand, plains of stones and rocky mountains.</a:t>
+              <a:t>Only sand.</a:t>
             </a:r>
             <a:endParaRPr lang="en-US" sz="4000" dirty="0"/>
           </a:p>
@@ -7778,7 +7867,7 @@
                 <a:ea typeface="Times New Roman" pitchFamily="34" charset="-122"/>
                 <a:cs typeface="Times New Roman" pitchFamily="34" charset="-120"/>
               </a:rPr>
-              <a:t>Where can she learn more about deserts?</a:t>
+              <a:t>What else did she see?</a:t>
             </a:r>
             <a:endParaRPr lang="en-US" sz="4000" dirty="0"/>
           </a:p>
@@ -7997,7 +8086,7 @@
                 <a:ea typeface="Times New Roman" pitchFamily="34" charset="-122"/>
                 <a:cs typeface="Times New Roman" pitchFamily="34" charset="-120"/>
               </a:rPr>
-              <a:t>In her atlas, her textbook and in this lesson.</a:t>
+              <a:t>Plains of stones and bare rocky mountains.</a:t>
             </a:r>
             <a:endParaRPr lang="en-US" sz="4000" dirty="0"/>
           </a:p>
@@ -8547,7 +8636,7 @@
                 <a:ea typeface="Calibri" pitchFamily="34" charset="-122"/>
                 <a:cs typeface="Calibri" pitchFamily="34" charset="-120"/>
               </a:rPr>
-              <a:t>1. MEANING AND LOCATION</a:t>
+              <a:t>1. LOCATION</a:t>
             </a:r>
             <a:endParaRPr lang="en-US" sz="1400" dirty="0"/>
           </a:p>
@@ -8594,7 +8683,7 @@
       </p:sp>
       <p:pic>
         <p:nvPicPr>
-          <p:cNvPr id="4" name="Image 0" descr="/home/claude/f4/img/v2/f2t_erg.jpg">    </p:cNvPr>
+          <p:cNvPr id="4" name="Image 0" descr="/home/claude/f4/img/v2/deserts_world_big.png">    </p:cNvPr>
           <p:cNvPicPr>
             <a:picLocks noChangeAspect="1"/>
           </p:cNvPicPr>
@@ -8608,8 +8697,8 @@
         </p:blipFill>
         <p:spPr>
           <a:xfrm>
-            <a:off x="2246610" y="1783080"/>
-            <a:ext cx="7698475" cy="4270248"/>
+            <a:off x="1215564" y="1783080"/>
+            <a:ext cx="9760567" cy="4270248"/>
           </a:xfrm>
           <a:prstGeom prst="rect">
             <a:avLst/>
@@ -8649,7 +8738,7 @@
                 <a:ea typeface="Times New Roman" pitchFamily="34" charset="-122"/>
                 <a:cs typeface="Times New Roman" pitchFamily="34" charset="-120"/>
               </a:rPr>
-              <a:t>Sand dunes in the Sahara.</a:t>
+              <a:t>The hot deserts of the world.</a:t>
             </a:r>
             <a:endParaRPr lang="en-US" sz="1800" dirty="0"/>
           </a:p>
@@ -9356,7 +9445,7 @@
                 <a:ea typeface="Calibri" pitchFamily="34" charset="-122"/>
                 <a:cs typeface="Calibri" pitchFamily="34" charset="-120"/>
               </a:rPr>
-              <a:t>1. MEANING AND LOCATION</a:t>
+              <a:t>1. LOCATION</a:t>
             </a:r>
             <a:endParaRPr lang="en-US" sz="1400" dirty="0"/>
           </a:p>
@@ -9463,7 +9552,7 @@
                 <a:ea typeface="Times New Roman" pitchFamily="34" charset="-122"/>
                 <a:cs typeface="Times New Roman" pitchFamily="34" charset="-120"/>
               </a:rPr>
-              <a:t>This region gets less than 250 mm of rain per year. What do we call it?</a:t>
+              <a:t>Near which lines are most hot deserts found?</a:t>
             </a:r>
             <a:endParaRPr lang="en-US" sz="4000" dirty="0"/>
           </a:p>
@@ -9575,7 +9664,7 @@
                 <a:ea typeface="Calibri" pitchFamily="34" charset="-122"/>
                 <a:cs typeface="Calibri" pitchFamily="34" charset="-120"/>
               </a:rPr>
-              <a:t>1. MEANING AND LOCATION</a:t>
+              <a:t>1. LOCATION</a:t>
             </a:r>
             <a:endParaRPr lang="en-US" sz="1400" dirty="0"/>
           </a:p>
@@ -9682,7 +9771,7 @@
                 <a:ea typeface="Times New Roman" pitchFamily="34" charset="-122"/>
                 <a:cs typeface="Times New Roman" pitchFamily="34" charset="-120"/>
               </a:rPr>
-              <a:t>A desert.</a:t>
+              <a:t>Near the Tropic of Cancer and the Tropic of Capricorn.</a:t>
             </a:r>
             <a:endParaRPr lang="en-US" sz="4000" dirty="0"/>
           </a:p>
@@ -9794,7 +9883,7 @@
                 <a:ea typeface="Calibri" pitchFamily="34" charset="-122"/>
                 <a:cs typeface="Calibri" pitchFamily="34" charset="-120"/>
               </a:rPr>
-              <a:t>1. MEANING AND LOCATION</a:t>
+              <a:t>2. TYPES</a:t>
             </a:r>
             <a:endParaRPr lang="en-US" sz="1400" dirty="0"/>
           </a:p>
@@ -9841,7 +9930,7 @@
       </p:sp>
       <p:pic>
         <p:nvPicPr>
-          <p:cNvPr id="4" name="Image 0" descr="/home/claude/f4/img/v2/deserts_world_big.png">    </p:cNvPr>
+          <p:cNvPr id="4" name="Image 0" descr="/home/claude/f4/img/v2/f2t_erg.jpg">    </p:cNvPr>
           <p:cNvPicPr>
             <a:picLocks noChangeAspect="1"/>
           </p:cNvPicPr>
@@ -9855,8 +9944,8 @@
         </p:blipFill>
         <p:spPr>
           <a:xfrm>
-            <a:off x="1215564" y="1783080"/>
-            <a:ext cx="9760567" cy="4270248"/>
+            <a:off x="2246610" y="1783080"/>
+            <a:ext cx="7698475" cy="4270248"/>
           </a:xfrm>
           <a:prstGeom prst="rect">
             <a:avLst/>
@@ -9896,7 +9985,7 @@
                 <a:ea typeface="Times New Roman" pitchFamily="34" charset="-122"/>
                 <a:cs typeface="Times New Roman" pitchFamily="34" charset="-120"/>
               </a:rPr>
-              <a:t>The main hot deserts of the world.</a:t>
+              <a:t>A sandy desert.</a:t>
             </a:r>
             <a:endParaRPr lang="en-US" sz="1800" dirty="0"/>
           </a:p>
@@ -10008,7 +10097,7 @@
                 <a:ea typeface="Calibri" pitchFamily="34" charset="-122"/>
                 <a:cs typeface="Calibri" pitchFamily="34" charset="-120"/>
               </a:rPr>
-              <a:t>1. MEANING AND LOCATION</a:t>
+              <a:t>2. TYPES</a:t>
             </a:r>
             <a:endParaRPr lang="en-US" sz="1400" dirty="0"/>
           </a:p>
@@ -10115,7 +10204,7 @@
                 <a:ea typeface="Times New Roman" pitchFamily="34" charset="-122"/>
                 <a:cs typeface="Times New Roman" pitchFamily="34" charset="-120"/>
               </a:rPr>
-              <a:t>Near which lines are most hot deserts found?</a:t>
+              <a:t>What is a desert of sand dunes called?</a:t>
             </a:r>
             <a:endParaRPr lang="en-US" sz="4000" dirty="0"/>
           </a:p>
@@ -10227,7 +10316,7 @@
                 <a:ea typeface="Calibri" pitchFamily="34" charset="-122"/>
                 <a:cs typeface="Calibri" pitchFamily="34" charset="-120"/>
               </a:rPr>
-              <a:t>1. MEANING AND LOCATION</a:t>
+              <a:t>2. TYPES</a:t>
             </a:r>
             <a:endParaRPr lang="en-US" sz="1400" dirty="0"/>
           </a:p>
@@ -10334,7 +10423,7 @@
                 <a:ea typeface="Times New Roman" pitchFamily="34" charset="-122"/>
                 <a:cs typeface="Times New Roman" pitchFamily="34" charset="-120"/>
               </a:rPr>
-              <a:t>Near the Tropic of Cancer and the Tropic of Capricorn.</a:t>
+              <a:t>A sandy desert (erg).</a:t>
             </a:r>
             <a:endParaRPr lang="en-US" sz="4000" dirty="0"/>
           </a:p>
@@ -10446,7 +10535,7 @@
                 <a:ea typeface="Calibri" pitchFamily="34" charset="-122"/>
                 <a:cs typeface="Calibri" pitchFamily="34" charset="-120"/>
               </a:rPr>
-              <a:t>2. TYPES OF DESERTS</a:t>
+              <a:t>2. TYPES</a:t>
             </a:r>
             <a:endParaRPr lang="en-US" sz="1400" dirty="0"/>
           </a:p>
@@ -10548,7 +10637,7 @@
                 <a:ea typeface="Times New Roman" pitchFamily="34" charset="-122"/>
                 <a:cs typeface="Times New Roman" pitchFamily="34" charset="-120"/>
               </a:rPr>
-              <a:t>A desert covered with small stones.</a:t>
+              <a:t>A desert of stones.</a:t>
             </a:r>
             <a:endParaRPr lang="en-US" sz="1800" dirty="0"/>
           </a:p>
@@ -10660,7 +10749,7 @@
                 <a:ea typeface="Calibri" pitchFamily="34" charset="-122"/>
                 <a:cs typeface="Calibri" pitchFamily="34" charset="-120"/>
               </a:rPr>
-              <a:t>2. TYPES OF DESERTS</a:t>
+              <a:t>2. TYPES</a:t>
             </a:r>
             <a:endParaRPr lang="en-US" sz="1400" dirty="0"/>
           </a:p>
@@ -10767,7 +10856,7 @@
                 <a:ea typeface="Times New Roman" pitchFamily="34" charset="-122"/>
                 <a:cs typeface="Times New Roman" pitchFamily="34" charset="-120"/>
               </a:rPr>
-              <a:t>Is this desert made of sand? What is it made of?</a:t>
+              <a:t>What is this desert made of?</a:t>
             </a:r>
             <a:endParaRPr lang="en-US" sz="4000" dirty="0"/>
           </a:p>
@@ -10879,7 +10968,7 @@
                 <a:ea typeface="Calibri" pitchFamily="34" charset="-122"/>
                 <a:cs typeface="Calibri" pitchFamily="34" charset="-120"/>
               </a:rPr>
-              <a:t>2. TYPES OF DESERTS</a:t>
+              <a:t>2. TYPES</a:t>
             </a:r>
             <a:endParaRPr lang="en-US" sz="1400" dirty="0"/>
           </a:p>
@@ -10986,7 +11075,7 @@
                 <a:ea typeface="Times New Roman" pitchFamily="34" charset="-122"/>
                 <a:cs typeface="Times New Roman" pitchFamily="34" charset="-120"/>
               </a:rPr>
-              <a:t>No. It is made of stones: it is a stony desert (reg).</a:t>
+              <a:t>Stones: it is a stony desert (reg).</a:t>
             </a:r>
             <a:endParaRPr lang="en-US" sz="4000" dirty="0"/>
           </a:p>
@@ -11098,7 +11187,7 @@
                 <a:ea typeface="Calibri" pitchFamily="34" charset="-122"/>
                 <a:cs typeface="Calibri" pitchFamily="34" charset="-120"/>
               </a:rPr>
-              <a:t>2. TYPES OF DESERTS</a:t>
+              <a:t>2. TYPES</a:t>
             </a:r>
             <a:endParaRPr lang="en-US" sz="1400" dirty="0"/>
           </a:p>
@@ -11312,7 +11401,7 @@
                 <a:ea typeface="Calibri" pitchFamily="34" charset="-122"/>
                 <a:cs typeface="Calibri" pitchFamily="34" charset="-120"/>
               </a:rPr>
-              <a:t>2. TYPES OF DESERTS</a:t>
+              <a:t>2. TYPES</a:t>
             </a:r>
             <a:endParaRPr lang="en-US" sz="1400" dirty="0"/>
           </a:p>
@@ -11419,7 +11508,7 @@
                 <a:ea typeface="Times New Roman" pitchFamily="34" charset="-122"/>
                 <a:cs typeface="Times New Roman" pitchFamily="34" charset="-120"/>
               </a:rPr>
-              <a:t>This desert is made of bare rock. What do we call it?</a:t>
+              <a:t>What do we call a desert of bare rock?</a:t>
             </a:r>
             <a:endParaRPr lang="en-US" sz="4000" dirty="0"/>
           </a:p>
@@ -12540,7 +12629,7 @@
                 <a:ea typeface="Calibri" pitchFamily="34" charset="-122"/>
                 <a:cs typeface="Calibri" pitchFamily="34" charset="-120"/>
               </a:rPr>
-              <a:t>2. TYPES OF DESERTS</a:t>
+              <a:t>2. TYPES</a:t>
             </a:r>
             <a:endParaRPr lang="en-US" sz="1400" dirty="0"/>
           </a:p>
@@ -12759,7 +12848,7 @@
                 <a:ea typeface="Calibri" pitchFamily="34" charset="-122"/>
                 <a:cs typeface="Calibri" pitchFamily="34" charset="-120"/>
               </a:rPr>
-              <a:t>3. CAUSES OF DESERTS</a:t>
+              <a:t>3. CHARACTERISTICS</a:t>
             </a:r>
             <a:endParaRPr lang="en-US" sz="1400" dirty="0"/>
           </a:p>
@@ -12861,7 +12950,7 @@
                 <a:ea typeface="Times New Roman" pitchFamily="34" charset="-122"/>
                 <a:cs typeface="Times New Roman" pitchFamily="34" charset="-120"/>
               </a:rPr>
-              <a:t>The wind comes from the land, not from the sea.</a:t>
+              <a:t>A wind that blows from the land.</a:t>
             </a:r>
             <a:endParaRPr lang="en-US" sz="1800" dirty="0"/>
           </a:p>
@@ -12973,7 +13062,7 @@
                 <a:ea typeface="Calibri" pitchFamily="34" charset="-122"/>
                 <a:cs typeface="Calibri" pitchFamily="34" charset="-120"/>
               </a:rPr>
-              <a:t>3. CAUSES OF DESERTS</a:t>
+              <a:t>3. CHARACTERISTICS</a:t>
             </a:r>
             <a:endParaRPr lang="en-US" sz="1400" dirty="0"/>
           </a:p>
@@ -13192,7 +13281,7 @@
                 <a:ea typeface="Calibri" pitchFamily="34" charset="-122"/>
                 <a:cs typeface="Calibri" pitchFamily="34" charset="-120"/>
               </a:rPr>
-              <a:t>3. CAUSES OF DESERTS</a:t>
+              <a:t>3. CHARACTERISTICS</a:t>
             </a:r>
             <a:endParaRPr lang="en-US" sz="1400" dirty="0"/>
           </a:p>
@@ -13299,7 +13388,7 @@
                 <a:ea typeface="Times New Roman" pitchFamily="34" charset="-122"/>
                 <a:cs typeface="Times New Roman" pitchFamily="34" charset="-120"/>
               </a:rPr>
-              <a:t>It comes from the land, so it is dry. There are no clouds.</a:t>
+              <a:t>It comes from the land, so it is dry.</a:t>
             </a:r>
             <a:endParaRPr lang="en-US" sz="4000" dirty="0"/>
           </a:p>
@@ -13510,7 +13599,7 @@
               <a:buNone/>
             </a:pPr>
             <a:r>
-              <a:rPr lang="en-US" sz="4000" b="1" dirty="0">
+              <a:rPr lang="en-US" sz="3200" b="1" dirty="0">
                 <a:solidFill>
                   <a:srgbClr val="111111"/>
                 </a:solidFill>
@@ -13520,7 +13609,7 @@
               </a:rPr>
               <a:t>Topic: Man in His Environment</a:t>
             </a:r>
-            <a:endParaRPr lang="en-US" sz="4000" dirty="0"/>
+            <a:endParaRPr lang="en-US" sz="3200" dirty="0"/>
           </a:p>
           <a:p>
             <a:pPr algn="l" indent="0" marL="0">
@@ -13530,7 +13619,7 @@
               <a:buNone/>
             </a:pPr>
             <a:r>
-              <a:rPr lang="en-US" sz="4000" b="1" dirty="0">
+              <a:rPr lang="en-US" sz="3200" b="1" dirty="0">
                 <a:solidFill>
                   <a:srgbClr val="111111"/>
                 </a:solidFill>
@@ -13540,7 +13629,7 @@
               </a:rPr>
               <a:t>Sub-topic: Natural Regions</a:t>
             </a:r>
-            <a:endParaRPr lang="en-US" sz="4000" dirty="0"/>
+            <a:endParaRPr lang="en-US" sz="3200" dirty="0"/>
           </a:p>
           <a:p>
             <a:pPr algn="l" indent="0" marL="0">
@@ -13550,7 +13639,7 @@
               <a:buNone/>
             </a:pPr>
             <a:r>
-              <a:rPr lang="en-US" sz="4000" b="1" dirty="0">
+              <a:rPr lang="en-US" sz="3200" b="1" dirty="0">
                 <a:solidFill>
                   <a:srgbClr val="990011"/>
                 </a:solidFill>
@@ -13560,7 +13649,7 @@
               </a:rPr>
               <a:t>Lesson 3 (Part 1): The Desert Regions: Location, Types and Characteristics</a:t>
             </a:r>
-            <a:endParaRPr lang="en-US" sz="4000" dirty="0"/>
+            <a:endParaRPr lang="en-US" sz="3200" dirty="0"/>
           </a:p>
         </p:txBody>
       </p:sp>
@@ -13735,7 +13824,7 @@
                 <a:ea typeface="Times New Roman" pitchFamily="34" charset="-122"/>
                 <a:cs typeface="Times New Roman" pitchFamily="34" charset="-120"/>
               </a:rPr>
-              <a:t>1. Meaning and Location</a:t>
+              <a:t>DEFINITIONS</a:t>
             </a:r>
             <a:endParaRPr lang="en-US" sz="3600" dirty="0"/>
           </a:p>
@@ -13749,47 +13838,8 @@
         </p:nvSpPr>
         <p:spPr>
           <a:xfrm>
-            <a:off x="5349240" y="1737360"/>
-            <a:ext cx="6522415" cy="457200"/>
-          </a:xfrm>
-          <a:prstGeom prst="rect">
-            <a:avLst/>
-          </a:prstGeom>
-          <a:noFill/>
-          <a:ln/>
-        </p:spPr>
-        <p:txBody>
-          <a:bodyPr wrap="square" lIns="0" tIns="0" rIns="0" bIns="0" rtlCol="0" anchor="ctr"/>
-          <a:lstStyle/>
-          <a:p>
-            <a:pPr algn="l" indent="0" marL="0">
-              <a:buNone/>
-            </a:pPr>
-            <a:r>
-              <a:rPr lang="en-US" sz="3200" b="1" dirty="0">
-                <a:solidFill>
-                  <a:srgbClr val="990011"/>
-                </a:solidFill>
-                <a:latin typeface="Times New Roman" pitchFamily="34" charset="0"/>
-                <a:ea typeface="Times New Roman" pitchFamily="34" charset="-122"/>
-                <a:cs typeface="Times New Roman" pitchFamily="34" charset="-120"/>
-              </a:rPr>
-              <a:t>A) Meaning</a:t>
-            </a:r>
-            <a:endParaRPr lang="en-US" sz="3200" dirty="0"/>
-          </a:p>
-        </p:txBody>
-      </p:sp>
-      <p:sp>
-        <p:nvSpPr>
-          <p:cNvPr id="6" name="Text 3"/>
-          <p:cNvSpPr/>
-          <p:nvPr/>
-        </p:nvSpPr>
-        <p:spPr>
-          <a:xfrm>
-            <a:off x="5349240" y="2240280"/>
-            <a:ext cx="6522415" cy="4206240"/>
+            <a:off x="5349240" y="1783080"/>
+            <a:ext cx="6522415" cy="4663440"/>
           </a:xfrm>
           <a:prstGeom prst="rect">
             <a:avLst/>
@@ -13816,16 +13866,17 @@
                 <a:ea typeface="Times New Roman" pitchFamily="34" charset="-122"/>
                 <a:cs typeface="Times New Roman" pitchFamily="34" charset="-120"/>
               </a:rPr>
-              <a:t>A desert is defined as follows:</a:t>
+              <a:t>The key terms of this lesson are defined as follows:</a:t>
             </a:r>
             <a:endParaRPr lang="en-US" sz="4000" dirty="0"/>
           </a:p>
           <a:p>
-            <a:pPr algn="l" indent="0" marL="0">
+            <a:pPr algn="l" marL="342900" indent="-342900">
               <a:spcAft>
                 <a:spcPts val="800"/>
               </a:spcAft>
-              <a:buNone/>
+              <a:buSzPct val="100000"/>
+              <a:buChar char="•"/>
             </a:pPr>
             <a:r>
               <a:rPr lang="en-US" sz="4000" b="1" dirty="0">
@@ -13838,11 +13889,12 @@
               </a:rPr>
               <a:t>Desert: </a:t>
             </a:r>
-            <a:pPr algn="l" indent="0" marL="0">
+            <a:pPr algn="l" marL="342900" indent="-342900">
               <a:spcAft>
                 <a:spcPts val="800"/>
               </a:spcAft>
-              <a:buNone/>
+              <a:buSzPct val="100000"/>
+              <a:buChar char="•"/>
             </a:pPr>
             <a:r>
               <a:rPr lang="en-US" sz="4000" dirty="0">
@@ -13853,7 +13905,7 @@
                 <a:ea typeface="Times New Roman" pitchFamily="34" charset="-122"/>
                 <a:cs typeface="Times New Roman" pitchFamily="34" charset="-120"/>
               </a:rPr>
-              <a:t>It is a region with less than 250 mm of rain per year and very few plants.</a:t>
+              <a:t>It is a region that receives less than 250 mm of rain per year.</a:t>
             </a:r>
             <a:endParaRPr lang="en-US" sz="4000" dirty="0"/>
           </a:p>
@@ -13971,9 +14023,131 @@
           </a:p>
         </p:txBody>
       </p:sp>
+      <p:sp>
+        <p:nvSpPr>
+          <p:cNvPr id="3" name="Text 1"/>
+          <p:cNvSpPr/>
+          <p:nvPr/>
+        </p:nvSpPr>
+        <p:spPr>
+          <a:xfrm>
+            <a:off x="365760" y="1005840"/>
+            <a:ext cx="11460175" cy="731520"/>
+          </a:xfrm>
+          <a:prstGeom prst="rect">
+            <a:avLst/>
+          </a:prstGeom>
+          <a:noFill/>
+          <a:ln/>
+        </p:spPr>
+        <p:txBody>
+          <a:bodyPr wrap="square" lIns="0" tIns="0" rIns="0" bIns="0" rtlCol="0" anchor="ctr">
+            <a:normAutofit/>
+          </a:bodyPr>
+          <a:lstStyle/>
+          <a:p>
+            <a:pPr algn="ctr" indent="0" marL="0">
+              <a:buNone/>
+            </a:pPr>
+            <a:r>
+              <a:rPr lang="en-US" sz="3600" b="1" dirty="0">
+                <a:solidFill>
+                  <a:srgbClr val="990011"/>
+                </a:solidFill>
+                <a:latin typeface="Times New Roman" pitchFamily="34" charset="0"/>
+                <a:ea typeface="Times New Roman" pitchFamily="34" charset="-122"/>
+                <a:cs typeface="Times New Roman" pitchFamily="34" charset="-120"/>
+              </a:rPr>
+              <a:t>1. Location</a:t>
+            </a:r>
+            <a:endParaRPr lang="en-US" sz="3600" dirty="0"/>
+          </a:p>
+        </p:txBody>
+      </p:sp>
+      <p:sp>
+        <p:nvSpPr>
+          <p:cNvPr id="4" name="Text 2"/>
+          <p:cNvSpPr/>
+          <p:nvPr/>
+        </p:nvSpPr>
+        <p:spPr>
+          <a:xfrm>
+            <a:off x="365760" y="1783080"/>
+            <a:ext cx="4846320" cy="4617720"/>
+          </a:xfrm>
+          <a:prstGeom prst="rect">
+            <a:avLst/>
+          </a:prstGeom>
+          <a:noFill/>
+          <a:ln/>
+        </p:spPr>
+        <p:txBody>
+          <a:bodyPr wrap="square" lIns="0" tIns="0" rIns="0" bIns="0" rtlCol="0" anchor="t"/>
+          <a:lstStyle/>
+          <a:p>
+            <a:pPr algn="l" indent="0" marL="0">
+              <a:spcAft>
+                <a:spcPts val="800"/>
+              </a:spcAft>
+              <a:buNone/>
+            </a:pPr>
+            <a:r>
+              <a:rPr lang="en-US" sz="3600" i="1" dirty="0">
+                <a:solidFill>
+                  <a:srgbClr val="111111"/>
+                </a:solidFill>
+                <a:latin typeface="Times New Roman" pitchFamily="34" charset="0"/>
+                <a:ea typeface="Times New Roman" pitchFamily="34" charset="-122"/>
+                <a:cs typeface="Times New Roman" pitchFamily="34" charset="-120"/>
+              </a:rPr>
+              <a:t>Hot deserts are found near the tropics:</a:t>
+            </a:r>
+            <a:endParaRPr lang="en-US" sz="3600" dirty="0"/>
+          </a:p>
+          <a:p>
+            <a:pPr algn="l" marL="342900" indent="-342900">
+              <a:spcAft>
+                <a:spcPts val="800"/>
+              </a:spcAft>
+              <a:buSzPct val="100000"/>
+              <a:buChar char="•"/>
+            </a:pPr>
+            <a:r>
+              <a:rPr lang="en-US" sz="3600" b="1" dirty="0">
+                <a:solidFill>
+                  <a:srgbClr val="111111"/>
+                </a:solidFill>
+                <a:latin typeface="Times New Roman" pitchFamily="34" charset="0"/>
+                <a:ea typeface="Times New Roman" pitchFamily="34" charset="-122"/>
+                <a:cs typeface="Times New Roman" pitchFamily="34" charset="-120"/>
+              </a:rPr>
+              <a:t>Africa: </a:t>
+            </a:r>
+            <a:pPr algn="l" marL="342900" indent="-342900">
+              <a:spcAft>
+                <a:spcPts val="800"/>
+              </a:spcAft>
+              <a:buSzPct val="100000"/>
+              <a:buChar char="•"/>
+            </a:pPr>
+            <a:r>
+              <a:rPr lang="en-US" sz="3600" dirty="0">
+                <a:solidFill>
+                  <a:srgbClr val="111111"/>
+                </a:solidFill>
+                <a:latin typeface="Times New Roman" pitchFamily="34" charset="0"/>
+                <a:ea typeface="Times New Roman" pitchFamily="34" charset="-122"/>
+                <a:cs typeface="Times New Roman" pitchFamily="34" charset="-120"/>
+              </a:rPr>
+              <a:t>The Sahara, the Kalahari and the Namib.</a:t>
+            </a:r>
+            <a:endParaRPr lang="en-US" sz="3600" dirty="0"/>
+          </a:p>
+        </p:txBody>
+      </p:sp>
       <p:pic>
         <p:nvPicPr>
-          <p:cNvPr id="3" name="Image 0" descr="/home/claude/f4/img/minesec_sheet.png">    </p:cNvPr>
+          <p:cNvPr id="5" name="Image 0" descr="/home/claude/f4/img/v2/deserts_world_big.png">    </p:cNvPr>
           <p:cNvPicPr>
             <a:picLocks noChangeAspect="1"/>
           </p:cNvPicPr>
@@ -13987,8 +14161,8 @@
         </p:blipFill>
         <p:spPr>
           <a:xfrm>
-            <a:off x="0" y="658368"/>
-            <a:ext cx="2468880" cy="5833872"/>
+            <a:off x="5349240" y="2461422"/>
+            <a:ext cx="6659575" cy="2913564"/>
           </a:xfrm>
           <a:prstGeom prst="rect">
             <a:avLst/>
@@ -13997,14 +14171,14 @@
       </p:pic>
       <p:sp>
         <p:nvSpPr>
-          <p:cNvPr id="4" name="Text 1"/>
+          <p:cNvPr id="6" name="Text 3"/>
           <p:cNvSpPr/>
           <p:nvPr/>
         </p:nvSpPr>
         <p:spPr>
           <a:xfrm>
-            <a:off x="2697480" y="1005840"/>
-            <a:ext cx="9174175" cy="731520"/>
+            <a:off x="5349240" y="6089904"/>
+            <a:ext cx="6659575" cy="347472"/>
           </a:xfrm>
           <a:prstGeom prst="rect">
             <a:avLst/>
@@ -14013,181 +14187,24 @@
           <a:ln/>
         </p:spPr>
         <p:txBody>
-          <a:bodyPr wrap="square" lIns="0" tIns="0" rIns="0" bIns="0" rtlCol="0" anchor="ctr">
-            <a:normAutofit/>
-          </a:bodyPr>
+          <a:bodyPr wrap="square" lIns="0" tIns="0" rIns="0" bIns="0" rtlCol="0" anchor="ctr"/>
           <a:lstStyle/>
           <a:p>
             <a:pPr algn="ctr" indent="0" marL="0">
               <a:buNone/>
             </a:pPr>
             <a:r>
-              <a:rPr lang="en-US" sz="3600" b="1" dirty="0">
-                <a:solidFill>
-                  <a:srgbClr val="990011"/>
+              <a:rPr lang="en-US" sz="1600" i="1" dirty="0">
+                <a:solidFill>
+                  <a:srgbClr val="555555"/>
                 </a:solidFill>
                 <a:latin typeface="Times New Roman" pitchFamily="34" charset="0"/>
                 <a:ea typeface="Times New Roman" pitchFamily="34" charset="-122"/>
                 <a:cs typeface="Times New Roman" pitchFamily="34" charset="-120"/>
               </a:rPr>
-              <a:t>1. Meaning and Location</a:t>
-            </a:r>
-            <a:endParaRPr lang="en-US" sz="3600" dirty="0"/>
-          </a:p>
-        </p:txBody>
-      </p:sp>
-      <p:sp>
-        <p:nvSpPr>
-          <p:cNvPr id="5" name="Text 2"/>
-          <p:cNvSpPr/>
-          <p:nvPr/>
-        </p:nvSpPr>
-        <p:spPr>
-          <a:xfrm>
-            <a:off x="2697480" y="1737360"/>
-            <a:ext cx="9174175" cy="457200"/>
-          </a:xfrm>
-          <a:prstGeom prst="rect">
-            <a:avLst/>
-          </a:prstGeom>
-          <a:noFill/>
-          <a:ln/>
-        </p:spPr>
-        <p:txBody>
-          <a:bodyPr wrap="square" lIns="0" tIns="0" rIns="0" bIns="0" rtlCol="0" anchor="ctr"/>
-          <a:lstStyle/>
-          <a:p>
-            <a:pPr algn="l" indent="0" marL="0">
-              <a:buNone/>
-            </a:pPr>
-            <a:r>
-              <a:rPr lang="en-US" sz="3200" b="1" dirty="0">
-                <a:solidFill>
-                  <a:srgbClr val="990011"/>
-                </a:solidFill>
-                <a:latin typeface="Times New Roman" pitchFamily="34" charset="0"/>
-                <a:ea typeface="Times New Roman" pitchFamily="34" charset="-122"/>
-                <a:cs typeface="Times New Roman" pitchFamily="34" charset="-120"/>
-              </a:rPr>
-              <a:t>B) Location</a:t>
-            </a:r>
-            <a:endParaRPr lang="en-US" sz="3200" dirty="0"/>
-          </a:p>
-        </p:txBody>
-      </p:sp>
-      <p:sp>
-        <p:nvSpPr>
-          <p:cNvPr id="6" name="Text 3"/>
-          <p:cNvSpPr/>
-          <p:nvPr/>
-        </p:nvSpPr>
-        <p:spPr>
-          <a:xfrm>
-            <a:off x="2697480" y="2240280"/>
-            <a:ext cx="9174175" cy="4206240"/>
-          </a:xfrm>
-          <a:prstGeom prst="rect">
-            <a:avLst/>
-          </a:prstGeom>
-          <a:noFill/>
-          <a:ln/>
-        </p:spPr>
-        <p:txBody>
-          <a:bodyPr wrap="square" lIns="0" tIns="0" rIns="0" bIns="0" rtlCol="0" anchor="t"/>
-          <a:lstStyle/>
-          <a:p>
-            <a:pPr algn="l" indent="0" marL="0">
-              <a:spcAft>
-                <a:spcPts val="800"/>
-              </a:spcAft>
-              <a:buNone/>
-            </a:pPr>
-            <a:r>
-              <a:rPr lang="en-US" sz="4000" i="1" dirty="0">
-                <a:solidFill>
-                  <a:srgbClr val="111111"/>
-                </a:solidFill>
-                <a:latin typeface="Times New Roman" pitchFamily="34" charset="0"/>
-                <a:ea typeface="Times New Roman" pitchFamily="34" charset="-122"/>
-                <a:cs typeface="Times New Roman" pitchFamily="34" charset="-120"/>
-              </a:rPr>
-              <a:t>Hot deserts are found near the tropics on the following continents:</a:t>
-            </a:r>
-            <a:endParaRPr lang="en-US" sz="4000" dirty="0"/>
-          </a:p>
-          <a:p>
-            <a:pPr algn="l" indent="0" marL="0">
-              <a:spcAft>
-                <a:spcPts val="800"/>
-              </a:spcAft>
-              <a:buNone/>
-            </a:pPr>
-            <a:r>
-              <a:rPr lang="en-US" sz="4000" b="1" dirty="0">
-                <a:solidFill>
-                  <a:srgbClr val="111111"/>
-                </a:solidFill>
-                <a:latin typeface="Times New Roman" pitchFamily="34" charset="0"/>
-                <a:ea typeface="Times New Roman" pitchFamily="34" charset="-122"/>
-                <a:cs typeface="Times New Roman" pitchFamily="34" charset="-120"/>
-              </a:rPr>
-              <a:t>Africa: </a:t>
-            </a:r>
-            <a:pPr algn="l" indent="0" marL="0">
-              <a:spcAft>
-                <a:spcPts val="800"/>
-              </a:spcAft>
-              <a:buNone/>
-            </a:pPr>
-            <a:r>
-              <a:rPr lang="en-US" sz="4000" dirty="0">
-                <a:solidFill>
-                  <a:srgbClr val="111111"/>
-                </a:solidFill>
-                <a:latin typeface="Times New Roman" pitchFamily="34" charset="0"/>
-                <a:ea typeface="Times New Roman" pitchFamily="34" charset="-122"/>
-                <a:cs typeface="Times New Roman" pitchFamily="34" charset="-120"/>
-              </a:rPr>
-              <a:t>The Sahara, the Kalahari and the Namib are in Africa.</a:t>
-            </a:r>
-            <a:endParaRPr lang="en-US" sz="4000" dirty="0"/>
-          </a:p>
-          <a:p>
-            <a:pPr algn="l" indent="0" marL="0">
-              <a:spcAft>
-                <a:spcPts val="800"/>
-              </a:spcAft>
-              <a:buNone/>
-            </a:pPr>
-            <a:r>
-              <a:rPr lang="en-US" sz="4000" b="1" dirty="0">
-                <a:solidFill>
-                  <a:srgbClr val="111111"/>
-                </a:solidFill>
-                <a:latin typeface="Times New Roman" pitchFamily="34" charset="0"/>
-                <a:ea typeface="Times New Roman" pitchFamily="34" charset="-122"/>
-                <a:cs typeface="Times New Roman" pitchFamily="34" charset="-120"/>
-              </a:rPr>
-              <a:t>Asia: </a:t>
-            </a:r>
-            <a:pPr algn="l" indent="0" marL="0">
-              <a:spcAft>
-                <a:spcPts val="800"/>
-              </a:spcAft>
-              <a:buNone/>
-            </a:pPr>
-            <a:r>
-              <a:rPr lang="en-US" sz="4000" dirty="0">
-                <a:solidFill>
-                  <a:srgbClr val="111111"/>
-                </a:solidFill>
-                <a:latin typeface="Times New Roman" pitchFamily="34" charset="0"/>
-                <a:ea typeface="Times New Roman" pitchFamily="34" charset="-122"/>
-                <a:cs typeface="Times New Roman" pitchFamily="34" charset="-120"/>
-              </a:rPr>
-              <a:t>The Arabian Desert and the Thar Desert are in Asia.</a:t>
-            </a:r>
-            <a:endParaRPr lang="en-US" sz="4000" dirty="0"/>
+              <a:t>Illustration: the hot deserts of the world</a:t>
+            </a:r>
+            <a:endParaRPr lang="en-US" sz="1600" dirty="0"/>
           </a:p>
         </p:txBody>
       </p:sp>
@@ -14362,7 +14379,7 @@
                 <a:ea typeface="Times New Roman" pitchFamily="34" charset="-122"/>
                 <a:cs typeface="Times New Roman" pitchFamily="34" charset="-120"/>
               </a:rPr>
-              <a:t>1. Meaning and Location</a:t>
+              <a:t>1. Location</a:t>
             </a:r>
             <a:endParaRPr lang="en-US" sz="3600" dirty="0"/>
           </a:p>
@@ -14376,8 +14393,8 @@
         </p:nvSpPr>
         <p:spPr>
           <a:xfrm>
-            <a:off x="5349240" y="1737360"/>
-            <a:ext cx="6522415" cy="457200"/>
+            <a:off x="5349240" y="1783080"/>
+            <a:ext cx="6522415" cy="4663440"/>
           </a:xfrm>
           <a:prstGeom prst="rect">
             <a:avLst/>
@@ -14386,56 +14403,36 @@
           <a:ln/>
         </p:spPr>
         <p:txBody>
-          <a:bodyPr wrap="square" lIns="0" tIns="0" rIns="0" bIns="0" rtlCol="0" anchor="ctr"/>
-          <a:lstStyle/>
-          <a:p>
-            <a:pPr algn="l" indent="0" marL="0">
-              <a:buNone/>
+          <a:bodyPr wrap="square" lIns="0" tIns="0" rIns="0" bIns="0" rtlCol="0" anchor="t"/>
+          <a:lstStyle/>
+          <a:p>
+            <a:pPr algn="l" marL="342900" indent="-342900">
+              <a:spcAft>
+                <a:spcPts val="800"/>
+              </a:spcAft>
+              <a:buSzPct val="100000"/>
+              <a:buChar char="•"/>
             </a:pPr>
             <a:r>
-              <a:rPr lang="en-US" sz="3200" b="1" dirty="0">
-                <a:solidFill>
-                  <a:srgbClr val="990011"/>
+              <a:rPr lang="en-US" sz="4000" b="1" dirty="0">
+                <a:solidFill>
+                  <a:srgbClr val="111111"/>
                 </a:solidFill>
                 <a:latin typeface="Times New Roman" pitchFamily="34" charset="0"/>
                 <a:ea typeface="Times New Roman" pitchFamily="34" charset="-122"/>
                 <a:cs typeface="Times New Roman" pitchFamily="34" charset="-120"/>
               </a:rPr>
-              <a:t>B) Location (continued)</a:t>
-            </a:r>
-            <a:endParaRPr lang="en-US" sz="3200" dirty="0"/>
-          </a:p>
-        </p:txBody>
-      </p:sp>
-      <p:sp>
-        <p:nvSpPr>
-          <p:cNvPr id="6" name="Text 3"/>
-          <p:cNvSpPr/>
-          <p:nvPr/>
-        </p:nvSpPr>
-        <p:spPr>
-          <a:xfrm>
-            <a:off x="5349240" y="2240280"/>
-            <a:ext cx="6522415" cy="4206240"/>
-          </a:xfrm>
-          <a:prstGeom prst="rect">
-            <a:avLst/>
-          </a:prstGeom>
-          <a:noFill/>
-          <a:ln/>
-        </p:spPr>
-        <p:txBody>
-          <a:bodyPr wrap="square" lIns="0" tIns="0" rIns="0" bIns="0" rtlCol="0" anchor="t"/>
-          <a:lstStyle/>
-          <a:p>
-            <a:pPr algn="l" indent="0" marL="0">
+              <a:t>Asia: </a:t>
+            </a:r>
+            <a:pPr algn="l" marL="342900" indent="-342900">
               <a:spcAft>
                 <a:spcPts val="800"/>
               </a:spcAft>
-              <a:buNone/>
+              <a:buSzPct val="100000"/>
+              <a:buChar char="•"/>
             </a:pPr>
             <a:r>
-              <a:rPr lang="en-US" sz="4000" b="1" dirty="0">
+              <a:rPr lang="en-US" sz="4000" dirty="0">
                 <a:solidFill>
                   <a:srgbClr val="111111"/>
                 </a:solidFill>
@@ -14443,16 +14440,20 @@
                 <a:ea typeface="Times New Roman" pitchFamily="34" charset="-122"/>
                 <a:cs typeface="Times New Roman" pitchFamily="34" charset="-120"/>
               </a:rPr>
-              <a:t>America and Australia: </a:t>
-            </a:r>
-            <a:pPr algn="l" indent="0" marL="0">
+              <a:t>The Arabian and the Thar deserts.</a:t>
+            </a:r>
+            <a:endParaRPr lang="en-US" sz="4000" dirty="0"/>
+          </a:p>
+          <a:p>
+            <a:pPr algn="l" marL="342900" indent="-342900">
               <a:spcAft>
                 <a:spcPts val="800"/>
               </a:spcAft>
-              <a:buNone/>
+              <a:buSzPct val="100000"/>
+              <a:buChar char="•"/>
             </a:pPr>
             <a:r>
-              <a:rPr lang="en-US" sz="4000" dirty="0">
+              <a:rPr lang="en-US" sz="4000" b="1" dirty="0">
                 <a:solidFill>
                   <a:srgbClr val="111111"/>
                 </a:solidFill>
@@ -14460,7 +14461,64 @@
                 <a:ea typeface="Times New Roman" pitchFamily="34" charset="-122"/>
                 <a:cs typeface="Times New Roman" pitchFamily="34" charset="-120"/>
               </a:rPr>
-              <a:t>The Atacama, the Mojave and the Great Australian Desert are found there.</a:t>
+              <a:t>America: </a:t>
+            </a:r>
+            <a:pPr algn="l" marL="342900" indent="-342900">
+              <a:spcAft>
+                <a:spcPts val="800"/>
+              </a:spcAft>
+              <a:buSzPct val="100000"/>
+              <a:buChar char="•"/>
+            </a:pPr>
+            <a:r>
+              <a:rPr lang="en-US" sz="4000" dirty="0">
+                <a:solidFill>
+                  <a:srgbClr val="111111"/>
+                </a:solidFill>
+                <a:latin typeface="Times New Roman" pitchFamily="34" charset="0"/>
+                <a:ea typeface="Times New Roman" pitchFamily="34" charset="-122"/>
+                <a:cs typeface="Times New Roman" pitchFamily="34" charset="-120"/>
+              </a:rPr>
+              <a:t>The Atacama and the Mojave deserts.</a:t>
+            </a:r>
+            <a:endParaRPr lang="en-US" sz="4000" dirty="0"/>
+          </a:p>
+          <a:p>
+            <a:pPr algn="l" marL="342900" indent="-342900">
+              <a:spcAft>
+                <a:spcPts val="800"/>
+              </a:spcAft>
+              <a:buSzPct val="100000"/>
+              <a:buChar char="•"/>
+            </a:pPr>
+            <a:r>
+              <a:rPr lang="en-US" sz="4000" b="1" dirty="0">
+                <a:solidFill>
+                  <a:srgbClr val="111111"/>
+                </a:solidFill>
+                <a:latin typeface="Times New Roman" pitchFamily="34" charset="0"/>
+                <a:ea typeface="Times New Roman" pitchFamily="34" charset="-122"/>
+                <a:cs typeface="Times New Roman" pitchFamily="34" charset="-120"/>
+              </a:rPr>
+              <a:t>Australia: </a:t>
+            </a:r>
+            <a:pPr algn="l" marL="342900" indent="-342900">
+              <a:spcAft>
+                <a:spcPts val="800"/>
+              </a:spcAft>
+              <a:buSzPct val="100000"/>
+              <a:buChar char="•"/>
+            </a:pPr>
+            <a:r>
+              <a:rPr lang="en-US" sz="4000" dirty="0">
+                <a:solidFill>
+                  <a:srgbClr val="111111"/>
+                </a:solidFill>
+                <a:latin typeface="Times New Roman" pitchFamily="34" charset="0"/>
+                <a:ea typeface="Times New Roman" pitchFamily="34" charset="-122"/>
+                <a:cs typeface="Times New Roman" pitchFamily="34" charset="-120"/>
+              </a:rPr>
+              <a:t>The Great Australian Desert.</a:t>
             </a:r>
             <a:endParaRPr lang="en-US" sz="4000" dirty="0"/>
           </a:p>
@@ -14578,48 +14636,9 @@
           </a:p>
         </p:txBody>
       </p:sp>
-      <p:sp>
-        <p:nvSpPr>
-          <p:cNvPr id="3" name="Text 1"/>
-          <p:cNvSpPr/>
-          <p:nvPr/>
-        </p:nvSpPr>
-        <p:spPr>
-          <a:xfrm>
-            <a:off x="457200" y="1005840"/>
-            <a:ext cx="11277295" cy="731520"/>
-          </a:xfrm>
-          <a:prstGeom prst="rect">
-            <a:avLst/>
-          </a:prstGeom>
-          <a:noFill/>
-          <a:ln/>
-        </p:spPr>
-        <p:txBody>
-          <a:bodyPr wrap="square" lIns="0" tIns="0" rIns="0" bIns="0" rtlCol="0" anchor="ctr"/>
-          <a:lstStyle/>
-          <a:p>
-            <a:pPr algn="ctr" indent="0" marL="0">
-              <a:buNone/>
-            </a:pPr>
-            <a:r>
-              <a:rPr lang="en-US" sz="3600" b="1" dirty="0">
-                <a:solidFill>
-                  <a:srgbClr val="990011"/>
-                </a:solidFill>
-                <a:latin typeface="Times New Roman" pitchFamily="34" charset="0"/>
-                <a:ea typeface="Times New Roman" pitchFamily="34" charset="-122"/>
-                <a:cs typeface="Times New Roman" pitchFamily="34" charset="-120"/>
-              </a:rPr>
-              <a:t>1. Meaning and Location</a:t>
-            </a:r>
-            <a:endParaRPr lang="en-US" sz="3600" dirty="0"/>
-          </a:p>
-        </p:txBody>
-      </p:sp>
       <p:pic>
         <p:nvPicPr>
-          <p:cNvPr id="4" name="Image 0" descr="/home/claude/f4/img/v2/deserts_world_big.png">    </p:cNvPr>
+          <p:cNvPr id="3" name="Image 0" descr="/home/claude/f4/img/minesec_sheet.png">    </p:cNvPr>
           <p:cNvPicPr>
             <a:picLocks noChangeAspect="1"/>
           </p:cNvPicPr>
@@ -14633,8 +14652,8 @@
         </p:blipFill>
         <p:spPr>
           <a:xfrm>
-            <a:off x="1215564" y="1783080"/>
-            <a:ext cx="9760567" cy="4270248"/>
+            <a:off x="0" y="658368"/>
+            <a:ext cx="5120640" cy="5833872"/>
           </a:xfrm>
           <a:prstGeom prst="rect">
             <a:avLst/>
@@ -14643,14 +14662,14 @@
       </p:pic>
       <p:sp>
         <p:nvSpPr>
-          <p:cNvPr id="5" name="Text 2"/>
+          <p:cNvPr id="4" name="Text 1"/>
           <p:cNvSpPr/>
           <p:nvPr/>
         </p:nvSpPr>
         <p:spPr>
           <a:xfrm>
-            <a:off x="457200" y="6089904"/>
-            <a:ext cx="11277295" cy="347472"/>
+            <a:off x="5349240" y="1005840"/>
+            <a:ext cx="6522415" cy="731520"/>
           </a:xfrm>
           <a:prstGeom prst="rect">
             <a:avLst/>
@@ -14659,24 +14678,146 @@
           <a:ln/>
         </p:spPr>
         <p:txBody>
-          <a:bodyPr wrap="square" lIns="0" tIns="0" rIns="0" bIns="0" rtlCol="0" anchor="ctr"/>
+          <a:bodyPr wrap="square" lIns="0" tIns="0" rIns="0" bIns="0" rtlCol="0" anchor="ctr">
+            <a:normAutofit/>
+          </a:bodyPr>
           <a:lstStyle/>
           <a:p>
             <a:pPr algn="ctr" indent="0" marL="0">
               <a:buNone/>
             </a:pPr>
             <a:r>
-              <a:rPr lang="en-US" sz="1800" i="1" dirty="0">
-                <a:solidFill>
-                  <a:srgbClr val="555555"/>
+              <a:rPr lang="en-US" sz="3600" b="1" dirty="0">
+                <a:solidFill>
+                  <a:srgbClr val="990011"/>
                 </a:solidFill>
                 <a:latin typeface="Times New Roman" pitchFamily="34" charset="0"/>
                 <a:ea typeface="Times New Roman" pitchFamily="34" charset="-122"/>
                 <a:cs typeface="Times New Roman" pitchFamily="34" charset="-120"/>
               </a:rPr>
-              <a:t>Illustration: hot deserts of the world</a:t>
-            </a:r>
-            <a:endParaRPr lang="en-US" sz="1800" dirty="0"/>
+              <a:t>2. Types of Deserts</a:t>
+            </a:r>
+            <a:endParaRPr lang="en-US" sz="3600" dirty="0"/>
+          </a:p>
+        </p:txBody>
+      </p:sp>
+      <p:sp>
+        <p:nvSpPr>
+          <p:cNvPr id="5" name="Text 2"/>
+          <p:cNvSpPr/>
+          <p:nvPr/>
+        </p:nvSpPr>
+        <p:spPr>
+          <a:xfrm>
+            <a:off x="5349240" y="1783080"/>
+            <a:ext cx="6522415" cy="4663440"/>
+          </a:xfrm>
+          <a:prstGeom prst="rect">
+            <a:avLst/>
+          </a:prstGeom>
+          <a:noFill/>
+          <a:ln/>
+        </p:spPr>
+        <p:txBody>
+          <a:bodyPr wrap="square" lIns="0" tIns="0" rIns="0" bIns="0" rtlCol="0" anchor="t"/>
+          <a:lstStyle/>
+          <a:p>
+            <a:pPr algn="l" indent="0" marL="0">
+              <a:spcAft>
+                <a:spcPts val="800"/>
+              </a:spcAft>
+              <a:buNone/>
+            </a:pPr>
+            <a:r>
+              <a:rPr lang="en-US" sz="4000" i="1" dirty="0">
+                <a:solidFill>
+                  <a:srgbClr val="111111"/>
+                </a:solidFill>
+                <a:latin typeface="Times New Roman" pitchFamily="34" charset="0"/>
+                <a:ea typeface="Times New Roman" pitchFamily="34" charset="-122"/>
+                <a:cs typeface="Times New Roman" pitchFamily="34" charset="-120"/>
+              </a:rPr>
+              <a:t>There are the following types of deserts:</a:t>
+            </a:r>
+            <a:endParaRPr lang="en-US" sz="4000" dirty="0"/>
+          </a:p>
+          <a:p>
+            <a:pPr algn="l" marL="342900" indent="-342900">
+              <a:spcAft>
+                <a:spcPts val="800"/>
+              </a:spcAft>
+              <a:buSzPct val="100000"/>
+              <a:buChar char="•"/>
+            </a:pPr>
+            <a:r>
+              <a:rPr lang="en-US" sz="4000" b="1" dirty="0">
+                <a:solidFill>
+                  <a:srgbClr val="111111"/>
+                </a:solidFill>
+                <a:latin typeface="Times New Roman" pitchFamily="34" charset="0"/>
+                <a:ea typeface="Times New Roman" pitchFamily="34" charset="-122"/>
+                <a:cs typeface="Times New Roman" pitchFamily="34" charset="-120"/>
+              </a:rPr>
+              <a:t>Hot deserts: </a:t>
+            </a:r>
+            <a:pPr algn="l" marL="342900" indent="-342900">
+              <a:spcAft>
+                <a:spcPts val="800"/>
+              </a:spcAft>
+              <a:buSzPct val="100000"/>
+              <a:buChar char="•"/>
+            </a:pPr>
+            <a:r>
+              <a:rPr lang="en-US" sz="4000" dirty="0">
+                <a:solidFill>
+                  <a:srgbClr val="111111"/>
+                </a:solidFill>
+                <a:latin typeface="Times New Roman" pitchFamily="34" charset="0"/>
+                <a:ea typeface="Times New Roman" pitchFamily="34" charset="-122"/>
+                <a:cs typeface="Times New Roman" pitchFamily="34" charset="-120"/>
+              </a:rPr>
+              <a:t>Hot all year, like the Sahara.</a:t>
+            </a:r>
+            <a:endParaRPr lang="en-US" sz="4000" dirty="0"/>
+          </a:p>
+          <a:p>
+            <a:pPr algn="l" marL="342900" indent="-342900">
+              <a:spcAft>
+                <a:spcPts val="800"/>
+              </a:spcAft>
+              <a:buSzPct val="100000"/>
+              <a:buChar char="•"/>
+            </a:pPr>
+            <a:r>
+              <a:rPr lang="en-US" sz="4000" b="1" dirty="0">
+                <a:solidFill>
+                  <a:srgbClr val="111111"/>
+                </a:solidFill>
+                <a:latin typeface="Times New Roman" pitchFamily="34" charset="0"/>
+                <a:ea typeface="Times New Roman" pitchFamily="34" charset="-122"/>
+                <a:cs typeface="Times New Roman" pitchFamily="34" charset="-120"/>
+              </a:rPr>
+              <a:t>Cold deserts: </a:t>
+            </a:r>
+            <a:pPr algn="l" marL="342900" indent="-342900">
+              <a:spcAft>
+                <a:spcPts val="800"/>
+              </a:spcAft>
+              <a:buSzPct val="100000"/>
+              <a:buChar char="•"/>
+            </a:pPr>
+            <a:r>
+              <a:rPr lang="en-US" sz="4000" dirty="0">
+                <a:solidFill>
+                  <a:srgbClr val="111111"/>
+                </a:solidFill>
+                <a:latin typeface="Times New Roman" pitchFamily="34" charset="0"/>
+                <a:ea typeface="Times New Roman" pitchFamily="34" charset="-122"/>
+                <a:cs typeface="Times New Roman" pitchFamily="34" charset="-120"/>
+              </a:rPr>
+              <a:t>Cold and dry, like the Gobi and Antarctica.</a:t>
+            </a:r>
+            <a:endParaRPr lang="en-US" sz="4000" dirty="0"/>
           </a:p>
         </p:txBody>
       </p:sp>
@@ -14792,9 +14933,111 @@
           </a:p>
         </p:txBody>
       </p:sp>
+      <p:sp>
+        <p:nvSpPr>
+          <p:cNvPr id="3" name="Text 1"/>
+          <p:cNvSpPr/>
+          <p:nvPr/>
+        </p:nvSpPr>
+        <p:spPr>
+          <a:xfrm>
+            <a:off x="365760" y="1005840"/>
+            <a:ext cx="11460175" cy="731520"/>
+          </a:xfrm>
+          <a:prstGeom prst="rect">
+            <a:avLst/>
+          </a:prstGeom>
+          <a:noFill/>
+          <a:ln/>
+        </p:spPr>
+        <p:txBody>
+          <a:bodyPr wrap="square" lIns="0" tIns="0" rIns="0" bIns="0" rtlCol="0" anchor="ctr">
+            <a:normAutofit/>
+          </a:bodyPr>
+          <a:lstStyle/>
+          <a:p>
+            <a:pPr algn="ctr" indent="0" marL="0">
+              <a:buNone/>
+            </a:pPr>
+            <a:r>
+              <a:rPr lang="en-US" sz="3600" b="1" dirty="0">
+                <a:solidFill>
+                  <a:srgbClr val="990011"/>
+                </a:solidFill>
+                <a:latin typeface="Times New Roman" pitchFamily="34" charset="0"/>
+                <a:ea typeface="Times New Roman" pitchFamily="34" charset="-122"/>
+                <a:cs typeface="Times New Roman" pitchFamily="34" charset="-120"/>
+              </a:rPr>
+              <a:t>2. Types of Deserts</a:t>
+            </a:r>
+            <a:endParaRPr lang="en-US" sz="3600" dirty="0"/>
+          </a:p>
+        </p:txBody>
+      </p:sp>
+      <p:sp>
+        <p:nvSpPr>
+          <p:cNvPr id="4" name="Text 2"/>
+          <p:cNvSpPr/>
+          <p:nvPr/>
+        </p:nvSpPr>
+        <p:spPr>
+          <a:xfrm>
+            <a:off x="365760" y="1783080"/>
+            <a:ext cx="4846320" cy="4617720"/>
+          </a:xfrm>
+          <a:prstGeom prst="rect">
+            <a:avLst/>
+          </a:prstGeom>
+          <a:noFill/>
+          <a:ln/>
+        </p:spPr>
+        <p:txBody>
+          <a:bodyPr wrap="square" lIns="0" tIns="0" rIns="0" bIns="0" rtlCol="0" anchor="t"/>
+          <a:lstStyle/>
+          <a:p>
+            <a:pPr algn="l" marL="342900" indent="-342900">
+              <a:spcAft>
+                <a:spcPts val="800"/>
+              </a:spcAft>
+              <a:buSzPct val="100000"/>
+              <a:buChar char="•"/>
+            </a:pPr>
+            <a:r>
+              <a:rPr lang="en-US" sz="3600" b="1" dirty="0">
+                <a:solidFill>
+                  <a:srgbClr val="111111"/>
+                </a:solidFill>
+                <a:latin typeface="Times New Roman" pitchFamily="34" charset="0"/>
+                <a:ea typeface="Times New Roman" pitchFamily="34" charset="-122"/>
+                <a:cs typeface="Times New Roman" pitchFamily="34" charset="-120"/>
+              </a:rPr>
+              <a:t>Sandy desert (erg): </a:t>
+            </a:r>
+            <a:pPr algn="l" marL="342900" indent="-342900">
+              <a:spcAft>
+                <a:spcPts val="800"/>
+              </a:spcAft>
+              <a:buSzPct val="100000"/>
+              <a:buChar char="•"/>
+            </a:pPr>
+            <a:r>
+              <a:rPr lang="en-US" sz="3600" dirty="0">
+                <a:solidFill>
+                  <a:srgbClr val="111111"/>
+                </a:solidFill>
+                <a:latin typeface="Times New Roman" pitchFamily="34" charset="0"/>
+                <a:ea typeface="Times New Roman" pitchFamily="34" charset="-122"/>
+                <a:cs typeface="Times New Roman" pitchFamily="34" charset="-120"/>
+              </a:rPr>
+              <a:t>It is covered with sand dunes.</a:t>
+            </a:r>
+            <a:endParaRPr lang="en-US" sz="3600" dirty="0"/>
+          </a:p>
+        </p:txBody>
+      </p:sp>
       <p:pic>
         <p:nvPicPr>
-          <p:cNvPr id="3" name="Image 0" descr="/home/claude/f4/img/minesec_sheet.png">    </p:cNvPr>
+          <p:cNvPr id="5" name="Image 0" descr="/home/claude/f4/img/v2/f2t_erg.jpg">    </p:cNvPr>
           <p:cNvPicPr>
             <a:picLocks noChangeAspect="1"/>
           </p:cNvPicPr>
@@ -14808,8 +15051,8 @@
         </p:blipFill>
         <p:spPr>
           <a:xfrm>
-            <a:off x="0" y="658368"/>
-            <a:ext cx="3840480" cy="5833872"/>
+            <a:off x="5349240" y="2071212"/>
+            <a:ext cx="6659575" cy="3693983"/>
           </a:xfrm>
           <a:prstGeom prst="rect">
             <a:avLst/>
@@ -14818,14 +15061,14 @@
       </p:pic>
       <p:sp>
         <p:nvSpPr>
-          <p:cNvPr id="4" name="Text 1"/>
+          <p:cNvPr id="6" name="Text 3"/>
           <p:cNvSpPr/>
           <p:nvPr/>
         </p:nvSpPr>
         <p:spPr>
           <a:xfrm>
-            <a:off x="4069080" y="1005840"/>
-            <a:ext cx="7802575" cy="731520"/>
+            <a:off x="5349240" y="6089904"/>
+            <a:ext cx="6659575" cy="347472"/>
           </a:xfrm>
           <a:prstGeom prst="rect">
             <a:avLst/>
@@ -14834,142 +15077,24 @@
           <a:ln/>
         </p:spPr>
         <p:txBody>
-          <a:bodyPr wrap="square" lIns="0" tIns="0" rIns="0" bIns="0" rtlCol="0" anchor="ctr">
-            <a:normAutofit/>
-          </a:bodyPr>
+          <a:bodyPr wrap="square" lIns="0" tIns="0" rIns="0" bIns="0" rtlCol="0" anchor="ctr"/>
           <a:lstStyle/>
           <a:p>
             <a:pPr algn="ctr" indent="0" marL="0">
               <a:buNone/>
             </a:pPr>
             <a:r>
-              <a:rPr lang="en-US" sz="3600" b="1" dirty="0">
-                <a:solidFill>
-                  <a:srgbClr val="990011"/>
+              <a:rPr lang="en-US" sz="1600" i="1" dirty="0">
+                <a:solidFill>
+                  <a:srgbClr val="555555"/>
                 </a:solidFill>
                 <a:latin typeface="Times New Roman" pitchFamily="34" charset="0"/>
                 <a:ea typeface="Times New Roman" pitchFamily="34" charset="-122"/>
                 <a:cs typeface="Times New Roman" pitchFamily="34" charset="-120"/>
               </a:rPr>
-              <a:t>2. Types of Deserts</a:t>
-            </a:r>
-            <a:endParaRPr lang="en-US" sz="3600" dirty="0"/>
-          </a:p>
-        </p:txBody>
-      </p:sp>
-      <p:sp>
-        <p:nvSpPr>
-          <p:cNvPr id="5" name="Text 2"/>
-          <p:cNvSpPr/>
-          <p:nvPr/>
-        </p:nvSpPr>
-        <p:spPr>
-          <a:xfrm>
-            <a:off x="4069080" y="1783080"/>
-            <a:ext cx="7802575" cy="4663440"/>
-          </a:xfrm>
-          <a:prstGeom prst="rect">
-            <a:avLst/>
-          </a:prstGeom>
-          <a:noFill/>
-          <a:ln/>
-        </p:spPr>
-        <p:txBody>
-          <a:bodyPr wrap="square" lIns="0" tIns="0" rIns="0" bIns="0" rtlCol="0" anchor="t"/>
-          <a:lstStyle/>
-          <a:p>
-            <a:pPr algn="l" indent="0" marL="0">
-              <a:spcAft>
-                <a:spcPts val="800"/>
-              </a:spcAft>
-              <a:buNone/>
-            </a:pPr>
-            <a:r>
-              <a:rPr lang="en-US" sz="4000" i="1" dirty="0">
-                <a:solidFill>
-                  <a:srgbClr val="111111"/>
-                </a:solidFill>
-                <a:latin typeface="Times New Roman" pitchFamily="34" charset="0"/>
-                <a:ea typeface="Times New Roman" pitchFamily="34" charset="-122"/>
-                <a:cs typeface="Times New Roman" pitchFamily="34" charset="-120"/>
-              </a:rPr>
-              <a:t>Deserts are classified in the following ways:</a:t>
-            </a:r>
-            <a:endParaRPr lang="en-US" sz="4000" dirty="0"/>
-          </a:p>
-          <a:p>
-            <a:pPr algn="l" indent="0" marL="0">
-              <a:spcAft>
-                <a:spcPts val="800"/>
-              </a:spcAft>
-              <a:buNone/>
-            </a:pPr>
-            <a:r>
-              <a:rPr lang="en-US" sz="4000" b="1" dirty="0">
-                <a:solidFill>
-                  <a:srgbClr val="111111"/>
-                </a:solidFill>
-                <a:latin typeface="Times New Roman" pitchFamily="34" charset="0"/>
-                <a:ea typeface="Times New Roman" pitchFamily="34" charset="-122"/>
-                <a:cs typeface="Times New Roman" pitchFamily="34" charset="-120"/>
-              </a:rPr>
-              <a:t>By temperature: </a:t>
-            </a:r>
-            <a:pPr algn="l" indent="0" marL="0">
-              <a:spcAft>
-                <a:spcPts val="800"/>
-              </a:spcAft>
-              <a:buNone/>
-            </a:pPr>
-            <a:r>
-              <a:rPr lang="en-US" sz="4000" dirty="0">
-                <a:solidFill>
-                  <a:srgbClr val="111111"/>
-                </a:solidFill>
-                <a:latin typeface="Times New Roman" pitchFamily="34" charset="0"/>
-                <a:ea typeface="Times New Roman" pitchFamily="34" charset="-122"/>
-                <a:cs typeface="Times New Roman" pitchFamily="34" charset="-120"/>
-              </a:rPr>
-              <a:t>There are hot deserts like the Sahara and cold deserts like the Gobi.</a:t>
-            </a:r>
-            <a:endParaRPr lang="en-US" sz="4000" dirty="0"/>
-          </a:p>
-          <a:p>
-            <a:pPr algn="l" indent="0" marL="0">
-              <a:spcAft>
-                <a:spcPts val="800"/>
-              </a:spcAft>
-              <a:buNone/>
-            </a:pPr>
-            <a:r>
-              <a:rPr lang="en-US" sz="4000" b="1" dirty="0">
-                <a:solidFill>
-                  <a:srgbClr val="111111"/>
-                </a:solidFill>
-                <a:latin typeface="Times New Roman" pitchFamily="34" charset="0"/>
-                <a:ea typeface="Times New Roman" pitchFamily="34" charset="-122"/>
-                <a:cs typeface="Times New Roman" pitchFamily="34" charset="-120"/>
-              </a:rPr>
-              <a:t>Erg: </a:t>
-            </a:r>
-            <a:pPr algn="l" indent="0" marL="0">
-              <a:spcAft>
-                <a:spcPts val="800"/>
-              </a:spcAft>
-              <a:buNone/>
-            </a:pPr>
-            <a:r>
-              <a:rPr lang="en-US" sz="4000" dirty="0">
-                <a:solidFill>
-                  <a:srgbClr val="111111"/>
-                </a:solidFill>
-                <a:latin typeface="Times New Roman" pitchFamily="34" charset="0"/>
-                <a:ea typeface="Times New Roman" pitchFamily="34" charset="-122"/>
-                <a:cs typeface="Times New Roman" pitchFamily="34" charset="-120"/>
-              </a:rPr>
-              <a:t>It is a sandy desert with dunes.</a:t>
-            </a:r>
-            <a:endParaRPr lang="en-US" sz="4000" dirty="0"/>
+              <a:t>Illustration: a sandy desert</a:t>
+            </a:r>
+            <a:endParaRPr lang="en-US" sz="1600" dirty="0"/>
           </a:p>
         </p:txBody>
       </p:sp>
@@ -15324,9 +15449,111 @@
           </a:p>
         </p:txBody>
       </p:sp>
+      <p:sp>
+        <p:nvSpPr>
+          <p:cNvPr id="3" name="Text 1"/>
+          <p:cNvSpPr/>
+          <p:nvPr/>
+        </p:nvSpPr>
+        <p:spPr>
+          <a:xfrm>
+            <a:off x="365760" y="1005840"/>
+            <a:ext cx="11460175" cy="731520"/>
+          </a:xfrm>
+          <a:prstGeom prst="rect">
+            <a:avLst/>
+          </a:prstGeom>
+          <a:noFill/>
+          <a:ln/>
+        </p:spPr>
+        <p:txBody>
+          <a:bodyPr wrap="square" lIns="0" tIns="0" rIns="0" bIns="0" rtlCol="0" anchor="ctr">
+            <a:normAutofit/>
+          </a:bodyPr>
+          <a:lstStyle/>
+          <a:p>
+            <a:pPr algn="ctr" indent="0" marL="0">
+              <a:buNone/>
+            </a:pPr>
+            <a:r>
+              <a:rPr lang="en-US" sz="3600" b="1" dirty="0">
+                <a:solidFill>
+                  <a:srgbClr val="990011"/>
+                </a:solidFill>
+                <a:latin typeface="Times New Roman" pitchFamily="34" charset="0"/>
+                <a:ea typeface="Times New Roman" pitchFamily="34" charset="-122"/>
+                <a:cs typeface="Times New Roman" pitchFamily="34" charset="-120"/>
+              </a:rPr>
+              <a:t>2. Types of Deserts</a:t>
+            </a:r>
+            <a:endParaRPr lang="en-US" sz="3600" dirty="0"/>
+          </a:p>
+        </p:txBody>
+      </p:sp>
+      <p:sp>
+        <p:nvSpPr>
+          <p:cNvPr id="4" name="Text 2"/>
+          <p:cNvSpPr/>
+          <p:nvPr/>
+        </p:nvSpPr>
+        <p:spPr>
+          <a:xfrm>
+            <a:off x="365760" y="1783080"/>
+            <a:ext cx="4846320" cy="4617720"/>
+          </a:xfrm>
+          <a:prstGeom prst="rect">
+            <a:avLst/>
+          </a:prstGeom>
+          <a:noFill/>
+          <a:ln/>
+        </p:spPr>
+        <p:txBody>
+          <a:bodyPr wrap="square" lIns="0" tIns="0" rIns="0" bIns="0" rtlCol="0" anchor="t"/>
+          <a:lstStyle/>
+          <a:p>
+            <a:pPr algn="l" marL="342900" indent="-342900">
+              <a:spcAft>
+                <a:spcPts val="800"/>
+              </a:spcAft>
+              <a:buSzPct val="100000"/>
+              <a:buChar char="•"/>
+            </a:pPr>
+            <a:r>
+              <a:rPr lang="en-US" sz="3600" b="1" dirty="0">
+                <a:solidFill>
+                  <a:srgbClr val="111111"/>
+                </a:solidFill>
+                <a:latin typeface="Times New Roman" pitchFamily="34" charset="0"/>
+                <a:ea typeface="Times New Roman" pitchFamily="34" charset="-122"/>
+                <a:cs typeface="Times New Roman" pitchFamily="34" charset="-120"/>
+              </a:rPr>
+              <a:t>Stony desert (reg): </a:t>
+            </a:r>
+            <a:pPr algn="l" marL="342900" indent="-342900">
+              <a:spcAft>
+                <a:spcPts val="800"/>
+              </a:spcAft>
+              <a:buSzPct val="100000"/>
+              <a:buChar char="•"/>
+            </a:pPr>
+            <a:r>
+              <a:rPr lang="en-US" sz="3600" dirty="0">
+                <a:solidFill>
+                  <a:srgbClr val="111111"/>
+                </a:solidFill>
+                <a:latin typeface="Times New Roman" pitchFamily="34" charset="0"/>
+                <a:ea typeface="Times New Roman" pitchFamily="34" charset="-122"/>
+                <a:cs typeface="Times New Roman" pitchFamily="34" charset="-120"/>
+              </a:rPr>
+              <a:t>It is covered with stones and gravel.</a:t>
+            </a:r>
+            <a:endParaRPr lang="en-US" sz="3600" dirty="0"/>
+          </a:p>
+        </p:txBody>
+      </p:sp>
       <p:pic>
         <p:nvPicPr>
-          <p:cNvPr id="3" name="Image 0" descr="/home/claude/f4/img/minesec_sheet.png">    </p:cNvPr>
+          <p:cNvPr id="5" name="Image 0" descr="/home/claude/f4/img/v2/f2t_reg.jpg">    </p:cNvPr>
           <p:cNvPicPr>
             <a:picLocks noChangeAspect="1"/>
           </p:cNvPicPr>
@@ -15340,8 +15567,8 @@
         </p:blipFill>
         <p:spPr>
           <a:xfrm>
-            <a:off x="0" y="658368"/>
-            <a:ext cx="5120640" cy="5833872"/>
+            <a:off x="5349240" y="2071212"/>
+            <a:ext cx="6659575" cy="3693983"/>
           </a:xfrm>
           <a:prstGeom prst="rect">
             <a:avLst/>
@@ -15350,14 +15577,14 @@
       </p:pic>
       <p:sp>
         <p:nvSpPr>
-          <p:cNvPr id="4" name="Text 1"/>
+          <p:cNvPr id="6" name="Text 3"/>
           <p:cNvSpPr/>
           <p:nvPr/>
         </p:nvSpPr>
         <p:spPr>
           <a:xfrm>
-            <a:off x="5349240" y="1005840"/>
-            <a:ext cx="6522415" cy="731520"/>
+            <a:off x="5349240" y="6089904"/>
+            <a:ext cx="6659575" cy="347472"/>
           </a:xfrm>
           <a:prstGeom prst="rect">
             <a:avLst/>
@@ -15366,122 +15593,24 @@
           <a:ln/>
         </p:spPr>
         <p:txBody>
-          <a:bodyPr wrap="square" lIns="0" tIns="0" rIns="0" bIns="0" rtlCol="0" anchor="ctr">
-            <a:normAutofit/>
-          </a:bodyPr>
+          <a:bodyPr wrap="square" lIns="0" tIns="0" rIns="0" bIns="0" rtlCol="0" anchor="ctr"/>
           <a:lstStyle/>
           <a:p>
             <a:pPr algn="ctr" indent="0" marL="0">
               <a:buNone/>
             </a:pPr>
             <a:r>
-              <a:rPr lang="en-US" sz="3600" b="1" dirty="0">
-                <a:solidFill>
-                  <a:srgbClr val="990011"/>
+              <a:rPr lang="en-US" sz="1600" i="1" dirty="0">
+                <a:solidFill>
+                  <a:srgbClr val="555555"/>
                 </a:solidFill>
                 <a:latin typeface="Times New Roman" pitchFamily="34" charset="0"/>
                 <a:ea typeface="Times New Roman" pitchFamily="34" charset="-122"/>
                 <a:cs typeface="Times New Roman" pitchFamily="34" charset="-120"/>
               </a:rPr>
-              <a:t>2. Types of Deserts (continued)</a:t>
-            </a:r>
-            <a:endParaRPr lang="en-US" sz="3600" dirty="0"/>
-          </a:p>
-        </p:txBody>
-      </p:sp>
-      <p:sp>
-        <p:nvSpPr>
-          <p:cNvPr id="5" name="Text 2"/>
-          <p:cNvSpPr/>
-          <p:nvPr/>
-        </p:nvSpPr>
-        <p:spPr>
-          <a:xfrm>
-            <a:off x="5349240" y="1783080"/>
-            <a:ext cx="6522415" cy="4663440"/>
-          </a:xfrm>
-          <a:prstGeom prst="rect">
-            <a:avLst/>
-          </a:prstGeom>
-          <a:noFill/>
-          <a:ln/>
-        </p:spPr>
-        <p:txBody>
-          <a:bodyPr wrap="square" lIns="0" tIns="0" rIns="0" bIns="0" rtlCol="0" anchor="t"/>
-          <a:lstStyle/>
-          <a:p>
-            <a:pPr algn="l" indent="0" marL="0">
-              <a:spcAft>
-                <a:spcPts val="800"/>
-              </a:spcAft>
-              <a:buNone/>
-            </a:pPr>
-            <a:r>
-              <a:rPr lang="en-US" sz="4000" b="1" dirty="0">
-                <a:solidFill>
-                  <a:srgbClr val="111111"/>
-                </a:solidFill>
-                <a:latin typeface="Times New Roman" pitchFamily="34" charset="0"/>
-                <a:ea typeface="Times New Roman" pitchFamily="34" charset="-122"/>
-                <a:cs typeface="Times New Roman" pitchFamily="34" charset="-120"/>
-              </a:rPr>
-              <a:t>Reg: </a:t>
-            </a:r>
-            <a:pPr algn="l" indent="0" marL="0">
-              <a:spcAft>
-                <a:spcPts val="800"/>
-              </a:spcAft>
-              <a:buNone/>
-            </a:pPr>
-            <a:r>
-              <a:rPr lang="en-US" sz="4000" dirty="0">
-                <a:solidFill>
-                  <a:srgbClr val="111111"/>
-                </a:solidFill>
-                <a:latin typeface="Times New Roman" pitchFamily="34" charset="0"/>
-                <a:ea typeface="Times New Roman" pitchFamily="34" charset="-122"/>
-                <a:cs typeface="Times New Roman" pitchFamily="34" charset="-120"/>
-              </a:rPr>
-              <a:t>It is a stony desert covered with pebbles.</a:t>
-            </a:r>
-            <a:endParaRPr lang="en-US" sz="4000" dirty="0"/>
-          </a:p>
-          <a:p>
-            <a:pPr algn="l" indent="0" marL="0">
-              <a:spcAft>
-                <a:spcPts val="800"/>
-              </a:spcAft>
-              <a:buNone/>
-            </a:pPr>
-            <a:r>
-              <a:rPr lang="en-US" sz="4000" b="1" dirty="0">
-                <a:solidFill>
-                  <a:srgbClr val="111111"/>
-                </a:solidFill>
-                <a:latin typeface="Times New Roman" pitchFamily="34" charset="0"/>
-                <a:ea typeface="Times New Roman" pitchFamily="34" charset="-122"/>
-                <a:cs typeface="Times New Roman" pitchFamily="34" charset="-120"/>
-              </a:rPr>
-              <a:t>Hamada: </a:t>
-            </a:r>
-            <a:pPr algn="l" indent="0" marL="0">
-              <a:spcAft>
-                <a:spcPts val="800"/>
-              </a:spcAft>
-              <a:buNone/>
-            </a:pPr>
-            <a:r>
-              <a:rPr lang="en-US" sz="4000" dirty="0">
-                <a:solidFill>
-                  <a:srgbClr val="111111"/>
-                </a:solidFill>
-                <a:latin typeface="Times New Roman" pitchFamily="34" charset="0"/>
-                <a:ea typeface="Times New Roman" pitchFamily="34" charset="-122"/>
-                <a:cs typeface="Times New Roman" pitchFamily="34" charset="-120"/>
-              </a:rPr>
-              <a:t>It is a rocky desert of bare rock.</a:t>
-            </a:r>
-            <a:endParaRPr lang="en-US" sz="4000" dirty="0"/>
+              <a:t>Illustration: a stony desert</a:t>
+            </a:r>
+            <a:endParaRPr lang="en-US" sz="1600" dirty="0"/>
           </a:p>
         </p:txBody>
       </p:sp>
@@ -15614,7 +15743,7 @@
         <p:spPr>
           <a:xfrm>
             <a:off x="0" y="658368"/>
-            <a:ext cx="2468880" cy="5833872"/>
+            <a:ext cx="5120640" cy="5833872"/>
           </a:xfrm>
           <a:prstGeom prst="rect">
             <a:avLst/>
@@ -15629,8 +15758,8 @@
         </p:nvSpPr>
         <p:spPr>
           <a:xfrm>
-            <a:off x="2697480" y="1005840"/>
-            <a:ext cx="9174175" cy="731520"/>
+            <a:off x="5349240" y="1005840"/>
+            <a:ext cx="6522415" cy="731520"/>
           </a:xfrm>
           <a:prstGeom prst="rect">
             <a:avLst/>
@@ -15656,7 +15785,7 @@
                 <a:ea typeface="Times New Roman" pitchFamily="34" charset="-122"/>
                 <a:cs typeface="Times New Roman" pitchFamily="34" charset="-120"/>
               </a:rPr>
-              <a:t>3. Causes of Deserts</a:t>
+              <a:t>2. Types of Deserts</a:t>
             </a:r>
             <a:endParaRPr lang="en-US" sz="3600" dirty="0"/>
           </a:p>
@@ -15670,8 +15799,8 @@
         </p:nvSpPr>
         <p:spPr>
           <a:xfrm>
-            <a:off x="2697480" y="1783080"/>
-            <a:ext cx="9174175" cy="4663440"/>
+            <a:off x="5349240" y="1783080"/>
+            <a:ext cx="6522415" cy="4663440"/>
           </a:xfrm>
           <a:prstGeom prst="rect">
             <a:avLst/>
@@ -15683,14 +15812,15 @@
           <a:bodyPr wrap="square" lIns="0" tIns="0" rIns="0" bIns="0" rtlCol="0" anchor="t"/>
           <a:lstStyle/>
           <a:p>
-            <a:pPr algn="l" indent="0" marL="0">
+            <a:pPr algn="l" marL="342900" indent="-342900">
               <a:spcAft>
                 <a:spcPts val="800"/>
               </a:spcAft>
-              <a:buNone/>
+              <a:buSzPct val="100000"/>
+              <a:buChar char="•"/>
             </a:pPr>
             <a:r>
-              <a:rPr lang="en-US" sz="4000" i="1" dirty="0">
+              <a:rPr lang="en-US" sz="4000" b="1" dirty="0">
                 <a:solidFill>
                   <a:srgbClr val="111111"/>
                 </a:solidFill>
@@ -15698,19 +15828,17 @@
                 <a:ea typeface="Times New Roman" pitchFamily="34" charset="-122"/>
                 <a:cs typeface="Times New Roman" pitchFamily="34" charset="-120"/>
               </a:rPr>
-              <a:t>Deserts are dry for the following reasons:</a:t>
-            </a:r>
-            <a:endParaRPr lang="en-US" sz="4000" dirty="0"/>
-          </a:p>
-          <a:p>
-            <a:pPr algn="l" indent="0" marL="0">
+              <a:t>Rocky desert (hamada): </a:t>
+            </a:r>
+            <a:pPr algn="l" marL="342900" indent="-342900">
               <a:spcAft>
                 <a:spcPts val="800"/>
               </a:spcAft>
-              <a:buNone/>
+              <a:buSzPct val="100000"/>
+              <a:buChar char="•"/>
             </a:pPr>
             <a:r>
-              <a:rPr lang="en-US" sz="4000" b="1" dirty="0">
+              <a:rPr lang="en-US" sz="4000" dirty="0">
                 <a:solidFill>
                   <a:srgbClr val="111111"/>
                 </a:solidFill>
@@ -15718,61 +15846,7 @@
                 <a:ea typeface="Times New Roman" pitchFamily="34" charset="-122"/>
                 <a:cs typeface="Times New Roman" pitchFamily="34" charset="-120"/>
               </a:rPr>
-              <a:t>Dry winds: </a:t>
-            </a:r>
-            <a:pPr algn="l" indent="0" marL="0">
-              <a:spcAft>
-                <a:spcPts val="800"/>
-              </a:spcAft>
-              <a:buNone/>
-            </a:pPr>
-            <a:r>
-              <a:rPr lang="en-US" sz="4000" dirty="0">
-                <a:solidFill>
-                  <a:srgbClr val="111111"/>
-                </a:solidFill>
-                <a:latin typeface="Times New Roman" pitchFamily="34" charset="0"/>
-                <a:ea typeface="Times New Roman" pitchFamily="34" charset="-122"/>
-                <a:cs typeface="Times New Roman" pitchFamily="34" charset="-120"/>
-              </a:rPr>
-              <a:t>The trade winds blow from the land and carry little moisture.</a:t>
-            </a:r>
-            <a:endParaRPr lang="en-US" sz="4000" dirty="0"/>
-          </a:p>
-          <a:p>
-            <a:pPr algn="l" indent="0" marL="0">
-              <a:spcAft>
-                <a:spcPts val="800"/>
-              </a:spcAft>
-              <a:buNone/>
-            </a:pPr>
-            <a:r>
-              <a:rPr lang="en-US" sz="4000" b="1" dirty="0">
-                <a:solidFill>
-                  <a:srgbClr val="111111"/>
-                </a:solidFill>
-                <a:latin typeface="Times New Roman" pitchFamily="34" charset="0"/>
-                <a:ea typeface="Times New Roman" pitchFamily="34" charset="-122"/>
-                <a:cs typeface="Times New Roman" pitchFamily="34" charset="-120"/>
-              </a:rPr>
-              <a:t>Cold ocean currents: </a:t>
-            </a:r>
-            <a:pPr algn="l" indent="0" marL="0">
-              <a:spcAft>
-                <a:spcPts val="800"/>
-              </a:spcAft>
-              <a:buNone/>
-            </a:pPr>
-            <a:r>
-              <a:rPr lang="en-US" sz="4000" dirty="0">
-                <a:solidFill>
-                  <a:srgbClr val="111111"/>
-                </a:solidFill>
-                <a:latin typeface="Times New Roman" pitchFamily="34" charset="0"/>
-                <a:ea typeface="Times New Roman" pitchFamily="34" charset="-122"/>
-                <a:cs typeface="Times New Roman" pitchFamily="34" charset="-120"/>
-              </a:rPr>
-              <a:t>Cold currents cool the air and stop rain clouds from forming, as in the Namib.</a:t>
+              <a:t>It is made of bare rock.</a:t>
             </a:r>
             <a:endParaRPr lang="en-US" sz="4000" dirty="0"/>
           </a:p>
@@ -15890,9 +15964,131 @@
           </a:p>
         </p:txBody>
       </p:sp>
+      <p:sp>
+        <p:nvSpPr>
+          <p:cNvPr id="3" name="Text 1"/>
+          <p:cNvSpPr/>
+          <p:nvPr/>
+        </p:nvSpPr>
+        <p:spPr>
+          <a:xfrm>
+            <a:off x="365760" y="1005840"/>
+            <a:ext cx="11460175" cy="731520"/>
+          </a:xfrm>
+          <a:prstGeom prst="rect">
+            <a:avLst/>
+          </a:prstGeom>
+          <a:noFill/>
+          <a:ln/>
+        </p:spPr>
+        <p:txBody>
+          <a:bodyPr wrap="square" lIns="0" tIns="0" rIns="0" bIns="0" rtlCol="0" anchor="ctr">
+            <a:normAutofit/>
+          </a:bodyPr>
+          <a:lstStyle/>
+          <a:p>
+            <a:pPr algn="ctr" indent="0" marL="0">
+              <a:buNone/>
+            </a:pPr>
+            <a:r>
+              <a:rPr lang="en-US" sz="3600" b="1" dirty="0">
+                <a:solidFill>
+                  <a:srgbClr val="990011"/>
+                </a:solidFill>
+                <a:latin typeface="Times New Roman" pitchFamily="34" charset="0"/>
+                <a:ea typeface="Times New Roman" pitchFamily="34" charset="-122"/>
+                <a:cs typeface="Times New Roman" pitchFamily="34" charset="-120"/>
+              </a:rPr>
+              <a:t>3. Characteristics and Causes</a:t>
+            </a:r>
+            <a:endParaRPr lang="en-US" sz="3600" dirty="0"/>
+          </a:p>
+        </p:txBody>
+      </p:sp>
+      <p:sp>
+        <p:nvSpPr>
+          <p:cNvPr id="4" name="Text 2"/>
+          <p:cNvSpPr/>
+          <p:nvPr/>
+        </p:nvSpPr>
+        <p:spPr>
+          <a:xfrm>
+            <a:off x="365760" y="1783080"/>
+            <a:ext cx="4846320" cy="4617720"/>
+          </a:xfrm>
+          <a:prstGeom prst="rect">
+            <a:avLst/>
+          </a:prstGeom>
+          <a:noFill/>
+          <a:ln/>
+        </p:spPr>
+        <p:txBody>
+          <a:bodyPr wrap="square" lIns="0" tIns="0" rIns="0" bIns="0" rtlCol="0" anchor="t"/>
+          <a:lstStyle/>
+          <a:p>
+            <a:pPr algn="l" indent="0" marL="0">
+              <a:spcAft>
+                <a:spcPts val="800"/>
+              </a:spcAft>
+              <a:buNone/>
+            </a:pPr>
+            <a:r>
+              <a:rPr lang="en-US" sz="3600" i="1" dirty="0">
+                <a:solidFill>
+                  <a:srgbClr val="111111"/>
+                </a:solidFill>
+                <a:latin typeface="Times New Roman" pitchFamily="34" charset="0"/>
+                <a:ea typeface="Times New Roman" pitchFamily="34" charset="-122"/>
+                <a:cs typeface="Times New Roman" pitchFamily="34" charset="-120"/>
+              </a:rPr>
+              <a:t>Deserts are dry for the following reasons:</a:t>
+            </a:r>
+            <a:endParaRPr lang="en-US" sz="3600" dirty="0"/>
+          </a:p>
+          <a:p>
+            <a:pPr algn="l" marL="342900" indent="-342900">
+              <a:spcAft>
+                <a:spcPts val="800"/>
+              </a:spcAft>
+              <a:buSzPct val="100000"/>
+              <a:buChar char="•"/>
+            </a:pPr>
+            <a:r>
+              <a:rPr lang="en-US" sz="3600" b="1" dirty="0">
+                <a:solidFill>
+                  <a:srgbClr val="111111"/>
+                </a:solidFill>
+                <a:latin typeface="Times New Roman" pitchFamily="34" charset="0"/>
+                <a:ea typeface="Times New Roman" pitchFamily="34" charset="-122"/>
+                <a:cs typeface="Times New Roman" pitchFamily="34" charset="-120"/>
+              </a:rPr>
+              <a:t>Dry winds: </a:t>
+            </a:r>
+            <a:pPr algn="l" marL="342900" indent="-342900">
+              <a:spcAft>
+                <a:spcPts val="800"/>
+              </a:spcAft>
+              <a:buSzPct val="100000"/>
+              <a:buChar char="•"/>
+            </a:pPr>
+            <a:r>
+              <a:rPr lang="en-US" sz="3600" dirty="0">
+                <a:solidFill>
+                  <a:srgbClr val="111111"/>
+                </a:solidFill>
+                <a:latin typeface="Times New Roman" pitchFamily="34" charset="0"/>
+                <a:ea typeface="Times New Roman" pitchFamily="34" charset="-122"/>
+                <a:cs typeface="Times New Roman" pitchFamily="34" charset="-120"/>
+              </a:rPr>
+              <a:t>The trade winds blow from the land and bring no rain.</a:t>
+            </a:r>
+            <a:endParaRPr lang="en-US" sz="3600" dirty="0"/>
+          </a:p>
+        </p:txBody>
+      </p:sp>
       <p:pic>
         <p:nvPicPr>
-          <p:cNvPr id="3" name="Image 0" descr="/home/claude/f4/img/minesec_sheet.png">    </p:cNvPr>
+          <p:cNvPr id="5" name="Image 0" descr="/home/claude/f4/img/v2/trade_wind_dry.png">    </p:cNvPr>
           <p:cNvPicPr>
             <a:picLocks noChangeAspect="1"/>
           </p:cNvPicPr>
@@ -15906,8 +16102,8 @@
         </p:blipFill>
         <p:spPr>
           <a:xfrm>
-            <a:off x="0" y="658368"/>
-            <a:ext cx="5120640" cy="5833872"/>
+            <a:off x="5349240" y="2617506"/>
+            <a:ext cx="6659575" cy="2601397"/>
           </a:xfrm>
           <a:prstGeom prst="rect">
             <a:avLst/>
@@ -15916,14 +16112,14 @@
       </p:pic>
       <p:sp>
         <p:nvSpPr>
-          <p:cNvPr id="4" name="Text 1"/>
+          <p:cNvPr id="6" name="Text 3"/>
           <p:cNvSpPr/>
           <p:nvPr/>
         </p:nvSpPr>
         <p:spPr>
           <a:xfrm>
-            <a:off x="5349240" y="1005840"/>
-            <a:ext cx="6522415" cy="731520"/>
+            <a:off x="5349240" y="6089904"/>
+            <a:ext cx="6659575" cy="347472"/>
           </a:xfrm>
           <a:prstGeom prst="rect">
             <a:avLst/>
@@ -15932,122 +16128,24 @@
           <a:ln/>
         </p:spPr>
         <p:txBody>
-          <a:bodyPr wrap="square" lIns="0" tIns="0" rIns="0" bIns="0" rtlCol="0" anchor="ctr">
-            <a:normAutofit/>
-          </a:bodyPr>
+          <a:bodyPr wrap="square" lIns="0" tIns="0" rIns="0" bIns="0" rtlCol="0" anchor="ctr"/>
           <a:lstStyle/>
           <a:p>
             <a:pPr algn="ctr" indent="0" marL="0">
               <a:buNone/>
             </a:pPr>
             <a:r>
-              <a:rPr lang="en-US" sz="3600" b="1" dirty="0">
-                <a:solidFill>
-                  <a:srgbClr val="990011"/>
+              <a:rPr lang="en-US" sz="1600" i="1" dirty="0">
+                <a:solidFill>
+                  <a:srgbClr val="555555"/>
                 </a:solidFill>
                 <a:latin typeface="Times New Roman" pitchFamily="34" charset="0"/>
                 <a:ea typeface="Times New Roman" pitchFamily="34" charset="-122"/>
                 <a:cs typeface="Times New Roman" pitchFamily="34" charset="-120"/>
               </a:rPr>
-              <a:t>3. Causes of Deserts (continued)</a:t>
-            </a:r>
-            <a:endParaRPr lang="en-US" sz="3600" dirty="0"/>
-          </a:p>
-        </p:txBody>
-      </p:sp>
-      <p:sp>
-        <p:nvSpPr>
-          <p:cNvPr id="5" name="Text 2"/>
-          <p:cNvSpPr/>
-          <p:nvPr/>
-        </p:nvSpPr>
-        <p:spPr>
-          <a:xfrm>
-            <a:off x="5349240" y="1783080"/>
-            <a:ext cx="6522415" cy="4663440"/>
-          </a:xfrm>
-          <a:prstGeom prst="rect">
-            <a:avLst/>
-          </a:prstGeom>
-          <a:noFill/>
-          <a:ln/>
-        </p:spPr>
-        <p:txBody>
-          <a:bodyPr wrap="square" lIns="0" tIns="0" rIns="0" bIns="0" rtlCol="0" anchor="t"/>
-          <a:lstStyle/>
-          <a:p>
-            <a:pPr algn="l" indent="0" marL="0">
-              <a:spcAft>
-                <a:spcPts val="800"/>
-              </a:spcAft>
-              <a:buNone/>
-            </a:pPr>
-            <a:r>
-              <a:rPr lang="en-US" sz="4000" b="1" dirty="0">
-                <a:solidFill>
-                  <a:srgbClr val="111111"/>
-                </a:solidFill>
-                <a:latin typeface="Times New Roman" pitchFamily="34" charset="0"/>
-                <a:ea typeface="Times New Roman" pitchFamily="34" charset="-122"/>
-                <a:cs typeface="Times New Roman" pitchFamily="34" charset="-120"/>
-              </a:rPr>
-              <a:t>Distance from the sea: </a:t>
-            </a:r>
-            <a:pPr algn="l" indent="0" marL="0">
-              <a:spcAft>
-                <a:spcPts val="800"/>
-              </a:spcAft>
-              <a:buNone/>
-            </a:pPr>
-            <a:r>
-              <a:rPr lang="en-US" sz="4000" dirty="0">
-                <a:solidFill>
-                  <a:srgbClr val="111111"/>
-                </a:solidFill>
-                <a:latin typeface="Times New Roman" pitchFamily="34" charset="0"/>
-                <a:ea typeface="Times New Roman" pitchFamily="34" charset="-122"/>
-                <a:cs typeface="Times New Roman" pitchFamily="34" charset="-120"/>
-              </a:rPr>
-              <a:t>Wet winds from the sea do not reach the centre of large continents.</a:t>
-            </a:r>
-            <a:endParaRPr lang="en-US" sz="4000" dirty="0"/>
-          </a:p>
-          <a:p>
-            <a:pPr algn="l" indent="0" marL="0">
-              <a:spcAft>
-                <a:spcPts val="800"/>
-              </a:spcAft>
-              <a:buNone/>
-            </a:pPr>
-            <a:r>
-              <a:rPr lang="en-US" sz="4000" b="1" dirty="0">
-                <a:solidFill>
-                  <a:srgbClr val="111111"/>
-                </a:solidFill>
-                <a:latin typeface="Times New Roman" pitchFamily="34" charset="0"/>
-                <a:ea typeface="Times New Roman" pitchFamily="34" charset="-122"/>
-                <a:cs typeface="Times New Roman" pitchFamily="34" charset="-120"/>
-              </a:rPr>
-              <a:t>Mountains: </a:t>
-            </a:r>
-            <a:pPr algn="l" indent="0" marL="0">
-              <a:spcAft>
-                <a:spcPts val="800"/>
-              </a:spcAft>
-              <a:buNone/>
-            </a:pPr>
-            <a:r>
-              <a:rPr lang="en-US" sz="4000" dirty="0">
-                <a:solidFill>
-                  <a:srgbClr val="111111"/>
-                </a:solidFill>
-                <a:latin typeface="Times New Roman" pitchFamily="34" charset="0"/>
-                <a:ea typeface="Times New Roman" pitchFamily="34" charset="-122"/>
-                <a:cs typeface="Times New Roman" pitchFamily="34" charset="-120"/>
-              </a:rPr>
-              <a:t>Mountains stop the wet winds and leave a dry rain shadow behind them.</a:t>
-            </a:r>
-            <a:endParaRPr lang="en-US" sz="4000" dirty="0"/>
+              <a:t>Illustration: a dry wind from the land</a:t>
+            </a:r>
+            <a:endParaRPr lang="en-US" sz="1600" dirty="0"/>
           </a:p>
         </p:txBody>
       </p:sp>
@@ -16157,7 +16255,7 @@
                 <a:ea typeface="Calibri" pitchFamily="34" charset="-122"/>
                 <a:cs typeface="Calibri" pitchFamily="34" charset="-120"/>
               </a:rPr>
-              <a:t>FORMATIVE EVALUATION</a:t>
+              <a:t>BOARD SUMMARY</a:t>
             </a:r>
             <a:endParaRPr lang="en-US" sz="1400" dirty="0"/>
           </a:p>
@@ -16180,7 +16278,7 @@
         <p:spPr>
           <a:xfrm>
             <a:off x="0" y="658368"/>
-            <a:ext cx="5120640" cy="5833872"/>
+            <a:ext cx="3840480" cy="5833872"/>
           </a:xfrm>
           <a:prstGeom prst="rect">
             <a:avLst/>
@@ -16195,8 +16293,8 @@
         </p:nvSpPr>
         <p:spPr>
           <a:xfrm>
-            <a:off x="5349240" y="1005840"/>
-            <a:ext cx="6522415" cy="731520"/>
+            <a:off x="4069080" y="1005840"/>
+            <a:ext cx="7802575" cy="731520"/>
           </a:xfrm>
           <a:prstGeom prst="rect">
             <a:avLst/>
@@ -16222,7 +16320,7 @@
                 <a:ea typeface="Times New Roman" pitchFamily="34" charset="-122"/>
                 <a:cs typeface="Times New Roman" pitchFamily="34" charset="-120"/>
               </a:rPr>
-              <a:t>Evaluation 1</a:t>
+              <a:t>3. Characteristics and Causes</a:t>
             </a:r>
             <a:endParaRPr lang="en-US" sz="3600" dirty="0"/>
           </a:p>
@@ -16236,8 +16334,8 @@
         </p:nvSpPr>
         <p:spPr>
           <a:xfrm>
-            <a:off x="5349240" y="1783080"/>
-            <a:ext cx="6522415" cy="4663440"/>
+            <a:off x="4069080" y="1783080"/>
+            <a:ext cx="7802575" cy="4663440"/>
           </a:xfrm>
           <a:prstGeom prst="rect">
             <a:avLst/>
@@ -16249,14 +16347,15 @@
           <a:bodyPr wrap="square" lIns="0" tIns="0" rIns="0" bIns="0" rtlCol="0" anchor="t"/>
           <a:lstStyle/>
           <a:p>
-            <a:pPr algn="l" indent="0" marL="0">
+            <a:pPr algn="l" marL="342900" indent="-342900">
               <a:spcAft>
                 <a:spcPts val="800"/>
               </a:spcAft>
-              <a:buNone/>
+              <a:buSzPct val="100000"/>
+              <a:buChar char="•"/>
             </a:pPr>
             <a:r>
-              <a:rPr lang="en-US" sz="4000" dirty="0">
+              <a:rPr lang="en-US" sz="4000" b="1" dirty="0">
                 <a:solidFill>
                   <a:srgbClr val="111111"/>
                 </a:solidFill>
@@ -16264,7 +16363,103 @@
                 <a:ea typeface="Times New Roman" pitchFamily="34" charset="-122"/>
                 <a:cs typeface="Times New Roman" pitchFamily="34" charset="-120"/>
               </a:rPr>
-              <a:t>What is a desert?</a:t>
+              <a:t>High pressure: </a:t>
+            </a:r>
+            <a:pPr algn="l" marL="342900" indent="-342900">
+              <a:spcAft>
+                <a:spcPts val="800"/>
+              </a:spcAft>
+              <a:buSzPct val="100000"/>
+              <a:buChar char="•"/>
+            </a:pPr>
+            <a:r>
+              <a:rPr lang="en-US" sz="4000" dirty="0">
+                <a:solidFill>
+                  <a:srgbClr val="111111"/>
+                </a:solidFill>
+                <a:latin typeface="Times New Roman" pitchFamily="34" charset="0"/>
+                <a:ea typeface="Times New Roman" pitchFamily="34" charset="-122"/>
+                <a:cs typeface="Times New Roman" pitchFamily="34" charset="-120"/>
+              </a:rPr>
+              <a:t>Dry air sinks near the tropics.</a:t>
+            </a:r>
+            <a:endParaRPr lang="en-US" sz="4000" dirty="0"/>
+          </a:p>
+          <a:p>
+            <a:pPr algn="l" marL="342900" indent="-342900">
+              <a:spcAft>
+                <a:spcPts val="800"/>
+              </a:spcAft>
+              <a:buSzPct val="100000"/>
+              <a:buChar char="•"/>
+            </a:pPr>
+            <a:r>
+              <a:rPr lang="en-US" sz="4000" b="1" dirty="0">
+                <a:solidFill>
+                  <a:srgbClr val="111111"/>
+                </a:solidFill>
+                <a:latin typeface="Times New Roman" pitchFamily="34" charset="0"/>
+                <a:ea typeface="Times New Roman" pitchFamily="34" charset="-122"/>
+                <a:cs typeface="Times New Roman" pitchFamily="34" charset="-120"/>
+              </a:rPr>
+              <a:t>Cold currents: </a:t>
+            </a:r>
+            <a:pPr algn="l" marL="342900" indent="-342900">
+              <a:spcAft>
+                <a:spcPts val="800"/>
+              </a:spcAft>
+              <a:buSzPct val="100000"/>
+              <a:buChar char="•"/>
+            </a:pPr>
+            <a:r>
+              <a:rPr lang="en-US" sz="4000" dirty="0">
+                <a:solidFill>
+                  <a:srgbClr val="111111"/>
+                </a:solidFill>
+                <a:latin typeface="Times New Roman" pitchFamily="34" charset="0"/>
+                <a:ea typeface="Times New Roman" pitchFamily="34" charset="-122"/>
+                <a:cs typeface="Times New Roman" pitchFamily="34" charset="-120"/>
+              </a:rPr>
+              <a:t>Cold sea currents give no rain on some coasts.</a:t>
+            </a:r>
+            <a:endParaRPr lang="en-US" sz="4000" dirty="0"/>
+          </a:p>
+          <a:p>
+            <a:pPr algn="l" marL="342900" indent="-342900">
+              <a:spcAft>
+                <a:spcPts val="800"/>
+              </a:spcAft>
+              <a:buSzPct val="100000"/>
+              <a:buChar char="•"/>
+            </a:pPr>
+            <a:r>
+              <a:rPr lang="en-US" sz="4000" b="1" dirty="0">
+                <a:solidFill>
+                  <a:srgbClr val="111111"/>
+                </a:solidFill>
+                <a:latin typeface="Times New Roman" pitchFamily="34" charset="0"/>
+                <a:ea typeface="Times New Roman" pitchFamily="34" charset="-122"/>
+                <a:cs typeface="Times New Roman" pitchFamily="34" charset="-120"/>
+              </a:rPr>
+              <a:t>Distance from the sea: </a:t>
+            </a:r>
+            <a:pPr algn="l" marL="342900" indent="-342900">
+              <a:spcAft>
+                <a:spcPts val="800"/>
+              </a:spcAft>
+              <a:buSzPct val="100000"/>
+              <a:buChar char="•"/>
+            </a:pPr>
+            <a:r>
+              <a:rPr lang="en-US" sz="4000" dirty="0">
+                <a:solidFill>
+                  <a:srgbClr val="111111"/>
+                </a:solidFill>
+                <a:latin typeface="Times New Roman" pitchFamily="34" charset="0"/>
+                <a:ea typeface="Times New Roman" pitchFamily="34" charset="-122"/>
+                <a:cs typeface="Times New Roman" pitchFamily="34" charset="-120"/>
+              </a:rPr>
+              <a:t>Wet sea winds do not reach the centre of continents.</a:t>
             </a:r>
             <a:endParaRPr lang="en-US" sz="4000" dirty="0"/>
           </a:p>
@@ -16441,7 +16636,7 @@
                 <a:ea typeface="Times New Roman" pitchFamily="34" charset="-122"/>
                 <a:cs typeface="Times New Roman" pitchFamily="34" charset="-120"/>
               </a:rPr>
-              <a:t>Expected Answer</a:t>
+              <a:t>Evaluation 1</a:t>
             </a:r>
             <a:endParaRPr lang="en-US" sz="3600" dirty="0"/>
           </a:p>
@@ -16483,7 +16678,7 @@
                 <a:ea typeface="Times New Roman" pitchFamily="34" charset="-122"/>
                 <a:cs typeface="Times New Roman" pitchFamily="34" charset="-120"/>
               </a:rPr>
-              <a:t>A region with less than 250 mm of rain per year and very few plants.</a:t>
+              <a:t>What is a desert?</a:t>
             </a:r>
             <a:endParaRPr lang="en-US" sz="4000" dirty="0"/>
           </a:p>
@@ -16660,7 +16855,7 @@
                 <a:ea typeface="Times New Roman" pitchFamily="34" charset="-122"/>
                 <a:cs typeface="Times New Roman" pitchFamily="34" charset="-120"/>
               </a:rPr>
-              <a:t>Evaluation 2</a:t>
+              <a:t>Expected Answer</a:t>
             </a:r>
             <a:endParaRPr lang="en-US" sz="3600" dirty="0"/>
           </a:p>
@@ -16702,7 +16897,7 @@
                 <a:ea typeface="Times New Roman" pitchFamily="34" charset="-122"/>
                 <a:cs typeface="Times New Roman" pitchFamily="34" charset="-120"/>
               </a:rPr>
-              <a:t>Name the three types of desert surface.</a:t>
+              <a:t>A region with less than 250 mm of rain per year and very few plants.</a:t>
             </a:r>
             <a:endParaRPr lang="en-US" sz="4000" dirty="0"/>
           </a:p>
@@ -16879,7 +17074,7 @@
                 <a:ea typeface="Times New Roman" pitchFamily="34" charset="-122"/>
                 <a:cs typeface="Times New Roman" pitchFamily="34" charset="-120"/>
               </a:rPr>
-              <a:t>Expected Answer</a:t>
+              <a:t>Evaluation 2</a:t>
             </a:r>
             <a:endParaRPr lang="en-US" sz="3600" dirty="0"/>
           </a:p>
@@ -16921,7 +17116,7 @@
                 <a:ea typeface="Times New Roman" pitchFamily="34" charset="-122"/>
                 <a:cs typeface="Times New Roman" pitchFamily="34" charset="-120"/>
               </a:rPr>
-              <a:t>Sandy (erg), stony (reg) and rocky (hamada).</a:t>
+              <a:t>Name the three types of desert surface.</a:t>
             </a:r>
             <a:endParaRPr lang="en-US" sz="4000" dirty="0"/>
           </a:p>
@@ -17033,7 +17228,7 @@
                 <a:ea typeface="Calibri" pitchFamily="34" charset="-122"/>
                 <a:cs typeface="Calibri" pitchFamily="34" charset="-120"/>
               </a:rPr>
-              <a:t>REMEDIATION</a:t>
+              <a:t>FORMATIVE EVALUATION</a:t>
             </a:r>
             <a:endParaRPr lang="en-US" sz="1400" dirty="0"/>
           </a:p>
@@ -17056,7 +17251,7 @@
         <p:spPr>
           <a:xfrm>
             <a:off x="0" y="658368"/>
-            <a:ext cx="2468880" cy="5833872"/>
+            <a:ext cx="5120640" cy="5833872"/>
           </a:xfrm>
           <a:prstGeom prst="rect">
             <a:avLst/>
@@ -17071,8 +17266,8 @@
         </p:nvSpPr>
         <p:spPr>
           <a:xfrm>
-            <a:off x="2697480" y="1005840"/>
-            <a:ext cx="9174175" cy="731520"/>
+            <a:off x="5349240" y="1005840"/>
+            <a:ext cx="6522415" cy="731520"/>
           </a:xfrm>
           <a:prstGeom prst="rect">
             <a:avLst/>
@@ -17098,7 +17293,7 @@
                 <a:ea typeface="Times New Roman" pitchFamily="34" charset="-122"/>
                 <a:cs typeface="Times New Roman" pitchFamily="34" charset="-120"/>
               </a:rPr>
-              <a:t>Remediation</a:t>
+              <a:t>Expected Answer</a:t>
             </a:r>
             <a:endParaRPr lang="en-US" sz="3600" dirty="0"/>
           </a:p>
@@ -17112,8 +17307,8 @@
         </p:nvSpPr>
         <p:spPr>
           <a:xfrm>
-            <a:off x="2697480" y="1783080"/>
-            <a:ext cx="9174175" cy="4663440"/>
+            <a:off x="5349240" y="1783080"/>
+            <a:ext cx="6522415" cy="4663440"/>
           </a:xfrm>
           <a:prstGeom prst="rect">
             <a:avLst/>
@@ -17132,7 +17327,7 @@
               <a:buNone/>
             </a:pPr>
             <a:r>
-              <a:rPr lang="en-US" sz="4000" b="1" dirty="0">
+              <a:rPr lang="en-US" sz="4000" dirty="0">
                 <a:solidFill>
                   <a:srgbClr val="111111"/>
                 </a:solidFill>
@@ -17140,73 +17335,7 @@
                 <a:ea typeface="Times New Roman" pitchFamily="34" charset="-122"/>
                 <a:cs typeface="Times New Roman" pitchFamily="34" charset="-120"/>
               </a:rPr>
-              <a:t>Fill in the blanks:</a:t>
-            </a:r>
-            <a:endParaRPr lang="en-US" sz="4000" dirty="0"/>
-          </a:p>
-          <a:p>
-            <a:pPr algn="l" marL="342900" indent="-342900">
-              <a:spcAft>
-                <a:spcPts val="800"/>
-              </a:spcAft>
-              <a:buSzPct val="100000"/>
-              <a:buFont typeface="+mj-lt"/>
-              <a:buAutoNum type="arabicPeriod" startAt="1"/>
-            </a:pPr>
-            <a:r>
-              <a:rPr lang="en-US" sz="4000" dirty="0">
-                <a:solidFill>
-                  <a:srgbClr val="111111"/>
-                </a:solidFill>
-                <a:latin typeface="Times New Roman" pitchFamily="34" charset="0"/>
-                <a:ea typeface="Times New Roman" pitchFamily="34" charset="-122"/>
-                <a:cs typeface="Times New Roman" pitchFamily="34" charset="-120"/>
-              </a:rPr>
-              <a:t>A sandy desert is called an ______.</a:t>
-            </a:r>
-            <a:endParaRPr lang="en-US" sz="4000" dirty="0"/>
-          </a:p>
-          <a:p>
-            <a:pPr algn="l" marL="342900" indent="-342900">
-              <a:spcAft>
-                <a:spcPts val="800"/>
-              </a:spcAft>
-              <a:buSzPct val="100000"/>
-              <a:buFont typeface="+mj-lt"/>
-              <a:buAutoNum type="arabicPeriod" startAt="1"/>
-            </a:pPr>
-            <a:r>
-              <a:rPr lang="en-US" sz="4000" dirty="0">
-                <a:solidFill>
-                  <a:srgbClr val="111111"/>
-                </a:solidFill>
-                <a:latin typeface="Times New Roman" pitchFamily="34" charset="0"/>
-                <a:ea typeface="Times New Roman" pitchFamily="34" charset="-122"/>
-                <a:cs typeface="Times New Roman" pitchFamily="34" charset="-120"/>
-              </a:rPr>
-              <a:t>A stony desert is called a ______.</a:t>
-            </a:r>
-            <a:endParaRPr lang="en-US" sz="4000" dirty="0"/>
-          </a:p>
-          <a:p>
-            <a:pPr algn="l" marL="342900" indent="-342900">
-              <a:spcAft>
-                <a:spcPts val="800"/>
-              </a:spcAft>
-              <a:buSzPct val="100000"/>
-              <a:buFont typeface="+mj-lt"/>
-              <a:buAutoNum type="arabicPeriod" startAt="1"/>
-            </a:pPr>
-            <a:r>
-              <a:rPr lang="en-US" sz="4000" dirty="0">
-                <a:solidFill>
-                  <a:srgbClr val="111111"/>
-                </a:solidFill>
-                <a:latin typeface="Times New Roman" pitchFamily="34" charset="0"/>
-                <a:ea typeface="Times New Roman" pitchFamily="34" charset="-122"/>
-                <a:cs typeface="Times New Roman" pitchFamily="34" charset="-120"/>
-              </a:rPr>
-              <a:t>The largest hot desert in the world is the ______.</a:t>
+              <a:t>Sandy (erg), stony (reg) and rocky (hamada).</a:t>
             </a:r>
             <a:endParaRPr lang="en-US" sz="4000" dirty="0"/>
           </a:p>
@@ -17318,7 +17447,7 @@
                 <a:ea typeface="Calibri" pitchFamily="34" charset="-122"/>
                 <a:cs typeface="Calibri" pitchFamily="34" charset="-120"/>
               </a:rPr>
-              <a:t>HOMEWORK</a:t>
+              <a:t>REMEDIATION</a:t>
             </a:r>
             <a:endParaRPr lang="en-US" sz="1400" dirty="0"/>
           </a:p>
@@ -17341,7 +17470,7 @@
         <p:spPr>
           <a:xfrm>
             <a:off x="0" y="658368"/>
-            <a:ext cx="5120640" cy="5833872"/>
+            <a:ext cx="2468880" cy="5833872"/>
           </a:xfrm>
           <a:prstGeom prst="rect">
             <a:avLst/>
@@ -17356,8 +17485,8 @@
         </p:nvSpPr>
         <p:spPr>
           <a:xfrm>
-            <a:off x="5349240" y="1005840"/>
-            <a:ext cx="6522415" cy="731520"/>
+            <a:off x="2697480" y="1005840"/>
+            <a:ext cx="9174175" cy="731520"/>
           </a:xfrm>
           <a:prstGeom prst="rect">
             <a:avLst/>
@@ -17383,7 +17512,7 @@
                 <a:ea typeface="Times New Roman" pitchFamily="34" charset="-122"/>
                 <a:cs typeface="Times New Roman" pitchFamily="34" charset="-120"/>
               </a:rPr>
-              <a:t>Homework</a:t>
+              <a:t>Remediation</a:t>
             </a:r>
             <a:endParaRPr lang="en-US" sz="3600" dirty="0"/>
           </a:p>
@@ -17397,8 +17526,8 @@
         </p:nvSpPr>
         <p:spPr>
           <a:xfrm>
-            <a:off x="5349240" y="1783080"/>
-            <a:ext cx="6522415" cy="4663440"/>
+            <a:off x="2697480" y="1783080"/>
+            <a:ext cx="9174175" cy="4663440"/>
           </a:xfrm>
           <a:prstGeom prst="rect">
             <a:avLst/>
@@ -17417,7 +17546,7 @@
               <a:buNone/>
             </a:pPr>
             <a:r>
-              <a:rPr lang="en-US" sz="4000" dirty="0">
+              <a:rPr lang="en-US" sz="4000" b="1" dirty="0">
                 <a:solidFill>
                   <a:srgbClr val="111111"/>
                 </a:solidFill>
@@ -17425,7 +17554,73 @@
                 <a:ea typeface="Times New Roman" pitchFamily="34" charset="-122"/>
                 <a:cs typeface="Times New Roman" pitchFamily="34" charset="-120"/>
               </a:rPr>
-              <a:t>Think about the hottest days of March in Garoua. Are the nights also very hot, or cooler? Write two sentences about the difference between day and night.</a:t>
+              <a:t>Fill in the blanks:</a:t>
+            </a:r>
+            <a:endParaRPr lang="en-US" sz="4000" dirty="0"/>
+          </a:p>
+          <a:p>
+            <a:pPr algn="l" marL="342900" indent="-342900">
+              <a:spcAft>
+                <a:spcPts val="800"/>
+              </a:spcAft>
+              <a:buSzPct val="100000"/>
+              <a:buFont typeface="+mj-lt"/>
+              <a:buAutoNum type="arabicPeriod" startAt="1"/>
+            </a:pPr>
+            <a:r>
+              <a:rPr lang="en-US" sz="4000" dirty="0">
+                <a:solidFill>
+                  <a:srgbClr val="111111"/>
+                </a:solidFill>
+                <a:latin typeface="Times New Roman" pitchFamily="34" charset="0"/>
+                <a:ea typeface="Times New Roman" pitchFamily="34" charset="-122"/>
+                <a:cs typeface="Times New Roman" pitchFamily="34" charset="-120"/>
+              </a:rPr>
+              <a:t>A sandy desert is called an ______.</a:t>
+            </a:r>
+            <a:endParaRPr lang="en-US" sz="4000" dirty="0"/>
+          </a:p>
+          <a:p>
+            <a:pPr algn="l" marL="342900" indent="-342900">
+              <a:spcAft>
+                <a:spcPts val="800"/>
+              </a:spcAft>
+              <a:buSzPct val="100000"/>
+              <a:buFont typeface="+mj-lt"/>
+              <a:buAutoNum type="arabicPeriod" startAt="1"/>
+            </a:pPr>
+            <a:r>
+              <a:rPr lang="en-US" sz="4000" dirty="0">
+                <a:solidFill>
+                  <a:srgbClr val="111111"/>
+                </a:solidFill>
+                <a:latin typeface="Times New Roman" pitchFamily="34" charset="0"/>
+                <a:ea typeface="Times New Roman" pitchFamily="34" charset="-122"/>
+                <a:cs typeface="Times New Roman" pitchFamily="34" charset="-120"/>
+              </a:rPr>
+              <a:t>A stony desert is called a ______.</a:t>
+            </a:r>
+            <a:endParaRPr lang="en-US" sz="4000" dirty="0"/>
+          </a:p>
+          <a:p>
+            <a:pPr algn="l" marL="342900" indent="-342900">
+              <a:spcAft>
+                <a:spcPts val="800"/>
+              </a:spcAft>
+              <a:buSzPct val="100000"/>
+              <a:buFont typeface="+mj-lt"/>
+              <a:buAutoNum type="arabicPeriod" startAt="1"/>
+            </a:pPr>
+            <a:r>
+              <a:rPr lang="en-US" sz="4000" dirty="0">
+                <a:solidFill>
+                  <a:srgbClr val="111111"/>
+                </a:solidFill>
+                <a:latin typeface="Times New Roman" pitchFamily="34" charset="0"/>
+                <a:ea typeface="Times New Roman" pitchFamily="34" charset="-122"/>
+                <a:cs typeface="Times New Roman" pitchFamily="34" charset="-120"/>
+              </a:rPr>
+              <a:t>The largest hot desert in the world is the ______.</a:t>
             </a:r>
             <a:endParaRPr lang="en-US" sz="4000" dirty="0"/>
           </a:p>
@@ -17537,7 +17732,7 @@
                 <a:ea typeface="Calibri" pitchFamily="34" charset="-122"/>
                 <a:cs typeface="Calibri" pitchFamily="34" charset="-120"/>
               </a:rPr>
-              <a:t>NEXT LESSON</a:t>
+              <a:t>HOMEWORK</a:t>
             </a:r>
             <a:endParaRPr lang="en-US" sz="1400" dirty="0"/>
           </a:p>
@@ -17602,7 +17797,7 @@
                 <a:ea typeface="Times New Roman" pitchFamily="34" charset="-122"/>
                 <a:cs typeface="Times New Roman" pitchFamily="34" charset="-120"/>
               </a:rPr>
-              <a:t>Next Lesson</a:t>
+              <a:t>Homework</a:t>
             </a:r>
             <a:endParaRPr lang="en-US" sz="3600" dirty="0"/>
           </a:p>
@@ -17626,17 +17821,17 @@
           <a:ln/>
         </p:spPr>
         <p:txBody>
-          <a:bodyPr wrap="square" lIns="0" tIns="0" rIns="0" bIns="0" rtlCol="0" anchor="ctr"/>
-          <a:lstStyle/>
-          <a:p>
-            <a:pPr algn="ctr" indent="0" marL="0">
+          <a:bodyPr wrap="square" lIns="0" tIns="0" rIns="0" bIns="0" rtlCol="0" anchor="t"/>
+          <a:lstStyle/>
+          <a:p>
+            <a:pPr algn="l" indent="0" marL="0">
               <a:spcAft>
                 <a:spcPts val="800"/>
               </a:spcAft>
               <a:buNone/>
             </a:pPr>
             <a:r>
-              <a:rPr lang="en-US" sz="4000" b="1" dirty="0">
+              <a:rPr lang="en-US" sz="4000" dirty="0">
                 <a:solidFill>
                   <a:srgbClr val="111111"/>
                 </a:solidFill>
@@ -17644,27 +17839,7 @@
                 <a:ea typeface="Times New Roman" pitchFamily="34" charset="-122"/>
                 <a:cs typeface="Times New Roman" pitchFamily="34" charset="-120"/>
               </a:rPr>
-              <a:t>Our next lesson will be on:</a:t>
-            </a:r>
-            <a:endParaRPr lang="en-US" sz="4000" dirty="0"/>
-          </a:p>
-          <a:p>
-            <a:pPr algn="ctr" indent="0" marL="0">
-              <a:spcAft>
-                <a:spcPts val="800"/>
-              </a:spcAft>
-              <a:buNone/>
-            </a:pPr>
-            <a:r>
-              <a:rPr lang="en-US" sz="4000" b="1" dirty="0">
-                <a:solidFill>
-                  <a:srgbClr val="990011"/>
-                </a:solidFill>
-                <a:latin typeface="Times New Roman" pitchFamily="34" charset="0"/>
-                <a:ea typeface="Times New Roman" pitchFamily="34" charset="-122"/>
-                <a:cs typeface="Times New Roman" pitchFamily="34" charset="-120"/>
-              </a:rPr>
-              <a:t>Lesson 3 (Part 2): The Desert Regions: Characteristics (Climate)</a:t>
+              <a:t>Think about the hottest days of March in Garoua. Are the nights also very hot, or cooler? Write two sentences about the difference between day and night.</a:t>
             </a:r>
             <a:endParaRPr lang="en-US" sz="4000" dirty="0"/>
           </a:p>
@@ -17995,6 +18170,245 @@
                 <a:ea typeface="Calibri" pitchFamily="34" charset="-122"/>
                 <a:cs typeface="Calibri" pitchFamily="34" charset="-120"/>
               </a:rPr>
+              <a:t>NEXT LESSON</a:t>
+            </a:r>
+            <a:endParaRPr lang="en-US" sz="1400" dirty="0"/>
+          </a:p>
+        </p:txBody>
+      </p:sp>
+      <p:pic>
+        <p:nvPicPr>
+          <p:cNvPr id="3" name="Image 0" descr="/home/claude/f4/img/minesec_sheet.png">    </p:cNvPr>
+          <p:cNvPicPr>
+            <a:picLocks noChangeAspect="1"/>
+          </p:cNvPicPr>
+          <p:nvPr/>
+        </p:nvPicPr>
+        <p:blipFill>
+          <a:blip r:embed="rId1"/>
+          <a:stretch>
+            <a:fillRect/>
+          </a:stretch>
+        </p:blipFill>
+        <p:spPr>
+          <a:xfrm>
+            <a:off x="0" y="658368"/>
+            <a:ext cx="5120640" cy="5833872"/>
+          </a:xfrm>
+          <a:prstGeom prst="rect">
+            <a:avLst/>
+          </a:prstGeom>
+        </p:spPr>
+      </p:pic>
+      <p:sp>
+        <p:nvSpPr>
+          <p:cNvPr id="4" name="Text 1"/>
+          <p:cNvSpPr/>
+          <p:nvPr/>
+        </p:nvSpPr>
+        <p:spPr>
+          <a:xfrm>
+            <a:off x="5349240" y="1005840"/>
+            <a:ext cx="6522415" cy="731520"/>
+          </a:xfrm>
+          <a:prstGeom prst="rect">
+            <a:avLst/>
+          </a:prstGeom>
+          <a:noFill/>
+          <a:ln/>
+        </p:spPr>
+        <p:txBody>
+          <a:bodyPr wrap="square" lIns="0" tIns="0" rIns="0" bIns="0" rtlCol="0" anchor="ctr">
+            <a:normAutofit/>
+          </a:bodyPr>
+          <a:lstStyle/>
+          <a:p>
+            <a:pPr algn="ctr" indent="0" marL="0">
+              <a:buNone/>
+            </a:pPr>
+            <a:r>
+              <a:rPr lang="en-US" sz="3600" b="1" dirty="0">
+                <a:solidFill>
+                  <a:srgbClr val="990011"/>
+                </a:solidFill>
+                <a:latin typeface="Times New Roman" pitchFamily="34" charset="0"/>
+                <a:ea typeface="Times New Roman" pitchFamily="34" charset="-122"/>
+                <a:cs typeface="Times New Roman" pitchFamily="34" charset="-120"/>
+              </a:rPr>
+              <a:t>Next Lesson</a:t>
+            </a:r>
+            <a:endParaRPr lang="en-US" sz="3600" dirty="0"/>
+          </a:p>
+        </p:txBody>
+      </p:sp>
+      <p:sp>
+        <p:nvSpPr>
+          <p:cNvPr id="5" name="Text 2"/>
+          <p:cNvSpPr/>
+          <p:nvPr/>
+        </p:nvSpPr>
+        <p:spPr>
+          <a:xfrm>
+            <a:off x="5349240" y="1783080"/>
+            <a:ext cx="6522415" cy="4663440"/>
+          </a:xfrm>
+          <a:prstGeom prst="rect">
+            <a:avLst/>
+          </a:prstGeom>
+          <a:noFill/>
+          <a:ln/>
+        </p:spPr>
+        <p:txBody>
+          <a:bodyPr wrap="square" lIns="0" tIns="0" rIns="0" bIns="0" rtlCol="0" anchor="ctr"/>
+          <a:lstStyle/>
+          <a:p>
+            <a:pPr algn="ctr" indent="0" marL="0">
+              <a:spcAft>
+                <a:spcPts val="800"/>
+              </a:spcAft>
+              <a:buNone/>
+            </a:pPr>
+            <a:r>
+              <a:rPr lang="en-US" sz="4000" b="1" dirty="0">
+                <a:solidFill>
+                  <a:srgbClr val="111111"/>
+                </a:solidFill>
+                <a:latin typeface="Times New Roman" pitchFamily="34" charset="0"/>
+                <a:ea typeface="Times New Roman" pitchFamily="34" charset="-122"/>
+                <a:cs typeface="Times New Roman" pitchFamily="34" charset="-120"/>
+              </a:rPr>
+              <a:t>Our next lesson will be on:</a:t>
+            </a:r>
+            <a:endParaRPr lang="en-US" sz="4000" dirty="0"/>
+          </a:p>
+          <a:p>
+            <a:pPr algn="ctr" indent="0" marL="0">
+              <a:spcAft>
+                <a:spcPts val="800"/>
+              </a:spcAft>
+              <a:buNone/>
+            </a:pPr>
+            <a:r>
+              <a:rPr lang="en-US" sz="4000" b="1" dirty="0">
+                <a:solidFill>
+                  <a:srgbClr val="990011"/>
+                </a:solidFill>
+                <a:latin typeface="Times New Roman" pitchFamily="34" charset="0"/>
+                <a:ea typeface="Times New Roman" pitchFamily="34" charset="-122"/>
+                <a:cs typeface="Times New Roman" pitchFamily="34" charset="-120"/>
+              </a:rPr>
+              <a:t>Lesson 3 (Part 2): The Desert Regions: Characteristics (Climate)</a:t>
+            </a:r>
+            <a:endParaRPr lang="en-US" sz="4000" dirty="0"/>
+          </a:p>
+        </p:txBody>
+      </p:sp>
+      <p:sp>
+        <p:nvSpPr>
+          <p:cNvPr id="25" name="Slide Number Placeholder 0"/>
+          <p:cNvSpPr>
+            <a:spLocks noGrp="1"/>
+          </p:cNvSpPr>
+          <p:nvPr>
+            <p:ph type="sldNum" sz="quarter" idx="4294967295"/>
+          </p:nvPr>
+        </p:nvSpPr>
+        <p:spPr>
+          <a:xfrm>
+            <a:off x="27432" y="91440"/>
+            <a:ext cx="585216" cy="475488"/>
+          </a:xfrm>
+          <a:prstGeom prst="rect">
+            <a:avLst/>
+          </a:prstGeom>
+          <a:extLst>
+            <a:ext uri="{C572A759-6A51-4108-AA02-DFA0A04FC94B}">
+              <ma14:wrappingTextBoxFlag xmlns:ma14="http://schemas.microsoft.com/office/mac/drawingml/2011/main" val="0"/>
+            </a:ext>
+          </a:extLst>
+        </p:spPr>
+        <p:txBody>
+          <a:bodyPr/>
+          <a:lstStyle>
+            <a:lvl1pPr>
+              <a:defRPr sz="2000">
+                <a:solidFill>
+                  <a:srgbClr val="FFFFFF"/>
+                </a:solidFill>
+                <a:latin typeface="Calibri"/>
+                <a:ea typeface="Calibri"/>
+                <a:cs typeface="Calibri"/>
+              </a:defRPr>
+            </a:lvl1pPr>
+          </a:lstStyle>
+          <a:p>
+            <a:pPr algn="ctr"/>
+            <a:fld id="{F7021451-1387-4CA6-816F-3879F97B5CBC}" type="slidenum">
+              <a:rPr b="1" lang="en-US"/>
+              <a:t>50</a:t>
+            </a:fld>
+            <a:endParaRPr lang="en-US"/>
+          </a:p>
+        </p:txBody>
+      </p:sp>
+    </p:spTree>
+  </p:cSld>
+  <p:clrMapOvr>
+    <a:masterClrMapping/>
+  </p:clrMapOvr>
+</p:sld>
+</file>
+
+<file path=ppt/slides/slide51.xml><?xml version="1.0" encoding="utf-8"?>
+<p:sld xmlns:a="http://schemas.openxmlformats.org/drawingml/2006/main" xmlns:r="http://schemas.openxmlformats.org/officeDocument/2006/relationships" xmlns:p="http://schemas.openxmlformats.org/presentationml/2006/main">
+  <p:cSld name="Slide 51">
+    <p:spTree>
+      <p:nvGrpSpPr>
+        <p:cNvPr id="1" name=""/>
+        <p:cNvGrpSpPr/>
+        <p:nvPr/>
+      </p:nvGrpSpPr>
+      <p:grpSpPr>
+        <a:xfrm>
+          <a:off x="0" y="0"/>
+          <a:ext cx="0" cy="0"/>
+          <a:chOff x="0" y="0"/>
+          <a:chExt cx="0" cy="0"/>
+        </a:xfrm>
+      </p:grpSpPr>
+      <p:sp>
+        <p:nvSpPr>
+          <p:cNvPr id="2" name="Text 0"/>
+          <p:cNvSpPr/>
+          <p:nvPr/>
+        </p:nvSpPr>
+        <p:spPr>
+          <a:xfrm>
+            <a:off x="457200" y="713232"/>
+            <a:ext cx="11368735" cy="274320"/>
+          </a:xfrm>
+          <a:prstGeom prst="rect">
+            <a:avLst/>
+          </a:prstGeom>
+          <a:noFill/>
+          <a:ln/>
+        </p:spPr>
+        <p:txBody>
+          <a:bodyPr wrap="square" lIns="0" tIns="0" rIns="0" bIns="0" rtlCol="0" anchor="ctr"/>
+          <a:lstStyle/>
+          <a:p>
+            <a:pPr algn="r" indent="0" marL="0">
+              <a:buNone/>
+            </a:pPr>
+            <a:r>
+              <a:rPr lang="en-US" sz="1400" b="1" dirty="0">
+                <a:solidFill>
+                  <a:srgbClr val="1C3F6E"/>
+                </a:solidFill>
+                <a:latin typeface="Calibri" pitchFamily="34" charset="0"/>
+                <a:ea typeface="Calibri" pitchFamily="34" charset="-122"/>
+                <a:cs typeface="Calibri" pitchFamily="34" charset="-120"/>
+              </a:rPr>
               <a:t>BILINGUAL GAME</a:t>
             </a:r>
             <a:endParaRPr lang="en-US" sz="1400" dirty="0"/>
@@ -18042,7 +18456,7 @@
       </p:sp>
       <p:graphicFrame>
         <p:nvGraphicFramePr>
-          <p:cNvPr id="51" name="Table 0"/>
+          <p:cNvPr id="52" name="Table 0"/>
           <p:cNvGraphicFramePr>
             <a:graphicFrameLocks noGrp="1"/>
           </p:cNvGraphicFramePr>
@@ -19354,7 +19768,7 @@
             <a:pPr algn="ctr"/>
             <a:fld id="{F7021451-1387-4CA6-816F-3879F97B5CBC}" type="slidenum">
               <a:rPr b="1" lang="en-US"/>
-              <a:t>50</a:t>
+              <a:t>51</a:t>
             </a:fld>
             <a:endParaRPr lang="en-US"/>
           </a:p>
@@ -19368,9 +19782,9 @@
 </p:sld>
 </file>
 
-<file path=ppt/slides/slide51.xml><?xml version="1.0" encoding="utf-8"?>
+<file path=ppt/slides/slide52.xml><?xml version="1.0" encoding="utf-8"?>
 <p:sld xmlns:a="http://schemas.openxmlformats.org/drawingml/2006/main" xmlns:r="http://schemas.openxmlformats.org/officeDocument/2006/relationships" xmlns:p="http://schemas.openxmlformats.org/presentationml/2006/main">
-  <p:cSld name="Slide 51">
+  <p:cSld name="Slide 52">
     <p:spTree>
       <p:nvGrpSpPr>
         <p:cNvPr id="1" name=""/>
@@ -19465,7 +19879,7 @@
       </p:sp>
       <p:graphicFrame>
         <p:nvGraphicFramePr>
-          <p:cNvPr id="52" name="Table 0"/>
+          <p:cNvPr id="53" name="Table 0"/>
           <p:cNvGraphicFramePr>
             <a:graphicFrameLocks noGrp="1"/>
           </p:cNvGraphicFramePr>
@@ -20087,7 +20501,7 @@
             <a:pPr algn="ctr"/>
             <a:fld id="{F7021451-1387-4CA6-816F-3879F97B5CBC}" type="slidenum">
               <a:rPr b="1" lang="en-US"/>
-              <a:t>51</a:t>
+              <a:t>52</a:t>
             </a:fld>
             <a:endParaRPr lang="en-US"/>
           </a:p>
@@ -20101,9 +20515,9 @@
 </p:sld>
 </file>
 
-<file path=ppt/slides/slide52.xml><?xml version="1.0" encoding="utf-8"?>
+<file path=ppt/slides/slide53.xml><?xml version="1.0" encoding="utf-8"?>
 <p:sld xmlns:a="http://schemas.openxmlformats.org/drawingml/2006/main" xmlns:r="http://schemas.openxmlformats.org/officeDocument/2006/relationships" xmlns:p="http://schemas.openxmlformats.org/presentationml/2006/main">
-  <p:cSld name="Slide 52">
+  <p:cSld name="Slide 53">
     <p:spTree>
       <p:nvGrpSpPr>
         <p:cNvPr id="1" name=""/>
@@ -20198,7 +20612,7 @@
       </p:sp>
       <p:graphicFrame>
         <p:nvGraphicFramePr>
-          <p:cNvPr id="53" name="Table 0"/>
+          <p:cNvPr id="54" name="Table 0"/>
           <p:cNvGraphicFramePr>
             <a:graphicFrameLocks noGrp="1"/>
           </p:cNvGraphicFramePr>
@@ -20308,7 +20722,7 @@
                           <a:ea typeface="Calibri" pitchFamily="34" charset="-122"/>
                           <a:cs typeface="Calibri" pitchFamily="34" charset="-120"/>
                         </a:rPr>
-                        <a:t>Meaning; Location; Types of Deserts; Causes of Deserts.</a:t>
+                        <a:t>DEFINITIONS; Location; Types of Deserts; Characteristics and Causes.</a:t>
                       </a:r>
                       <a:endParaRPr lang="en-US" sz="1600" dirty="0">
                         <a:latin typeface="Calibri" charset="0"/>
@@ -20958,331 +21372,6 @@
             <a:pPr algn="ctr"/>
             <a:fld id="{F7021451-1387-4CA6-816F-3879F97B5CBC}" type="slidenum">
               <a:rPr b="1" lang="en-US"/>
-              <a:t>52</a:t>
-            </a:fld>
-            <a:endParaRPr lang="en-US"/>
-          </a:p>
-        </p:txBody>
-      </p:sp>
-    </p:spTree>
-  </p:cSld>
-  <p:clrMapOvr>
-    <a:masterClrMapping/>
-  </p:clrMapOvr>
-</p:sld>
-</file>
-
-<file path=ppt/slides/slide53.xml><?xml version="1.0" encoding="utf-8"?>
-<p:sld xmlns:a="http://schemas.openxmlformats.org/drawingml/2006/main" xmlns:r="http://schemas.openxmlformats.org/officeDocument/2006/relationships" xmlns:p="http://schemas.openxmlformats.org/presentationml/2006/main">
-  <p:cSld name="Slide 53">
-    <p:spTree>
-      <p:nvGrpSpPr>
-        <p:cNvPr id="1" name=""/>
-        <p:cNvGrpSpPr/>
-        <p:nvPr/>
-      </p:nvGrpSpPr>
-      <p:grpSpPr>
-        <a:xfrm>
-          <a:off x="0" y="0"/>
-          <a:ext cx="0" cy="0"/>
-          <a:chOff x="0" y="0"/>
-          <a:chExt cx="0" cy="0"/>
-        </a:xfrm>
-      </p:grpSpPr>
-      <p:sp>
-        <p:nvSpPr>
-          <p:cNvPr id="2" name="Text 0"/>
-          <p:cNvSpPr/>
-          <p:nvPr/>
-        </p:nvSpPr>
-        <p:spPr>
-          <a:xfrm>
-            <a:off x="457200" y="713232"/>
-            <a:ext cx="11368735" cy="274320"/>
-          </a:xfrm>
-          <a:prstGeom prst="rect">
-            <a:avLst/>
-          </a:prstGeom>
-          <a:noFill/>
-          <a:ln/>
-        </p:spPr>
-        <p:txBody>
-          <a:bodyPr wrap="square" lIns="0" tIns="0" rIns="0" bIns="0" rtlCol="0" anchor="ctr"/>
-          <a:lstStyle/>
-          <a:p>
-            <a:pPr algn="r" indent="0" marL="0">
-              <a:buNone/>
-            </a:pPr>
-            <a:r>
-              <a:rPr lang="en-US" sz="1400" b="1" dirty="0">
-                <a:solidFill>
-                  <a:srgbClr val="1C3F6E"/>
-                </a:solidFill>
-                <a:latin typeface="Calibri" pitchFamily="34" charset="0"/>
-                <a:ea typeface="Calibri" pitchFamily="34" charset="-122"/>
-                <a:cs typeface="Calibri" pitchFamily="34" charset="-120"/>
-              </a:rPr>
-              <a:t>TEACHER'S NOTE</a:t>
-            </a:r>
-            <a:endParaRPr lang="en-US" sz="1400" dirty="0"/>
-          </a:p>
-        </p:txBody>
-      </p:sp>
-      <p:pic>
-        <p:nvPicPr>
-          <p:cNvPr id="3" name="Image 0" descr="/home/claude/f4/img/minesec_sheet.png">    </p:cNvPr>
-          <p:cNvPicPr>
-            <a:picLocks noChangeAspect="1"/>
-          </p:cNvPicPr>
-          <p:nvPr/>
-        </p:nvPicPr>
-        <p:blipFill>
-          <a:blip r:embed="rId1"/>
-          <a:stretch>
-            <a:fillRect/>
-          </a:stretch>
-        </p:blipFill>
-        <p:spPr>
-          <a:xfrm>
-            <a:off x="0" y="658368"/>
-            <a:ext cx="2468880" cy="5833872"/>
-          </a:xfrm>
-          <a:prstGeom prst="rect">
-            <a:avLst/>
-          </a:prstGeom>
-        </p:spPr>
-      </p:pic>
-      <p:sp>
-        <p:nvSpPr>
-          <p:cNvPr id="4" name="Text 1"/>
-          <p:cNvSpPr/>
-          <p:nvPr/>
-        </p:nvSpPr>
-        <p:spPr>
-          <a:xfrm>
-            <a:off x="2697480" y="1005840"/>
-            <a:ext cx="9174175" cy="731520"/>
-          </a:xfrm>
-          <a:prstGeom prst="rect">
-            <a:avLst/>
-          </a:prstGeom>
-          <a:noFill/>
-          <a:ln/>
-        </p:spPr>
-        <p:txBody>
-          <a:bodyPr wrap="square" lIns="0" tIns="0" rIns="0" bIns="0" rtlCol="0" anchor="ctr">
-            <a:normAutofit/>
-          </a:bodyPr>
-          <a:lstStyle/>
-          <a:p>
-            <a:pPr algn="ctr" indent="0" marL="0">
-              <a:buNone/>
-            </a:pPr>
-            <a:r>
-              <a:rPr lang="en-US" sz="3600" b="1" dirty="0">
-                <a:solidFill>
-                  <a:srgbClr val="990011"/>
-                </a:solidFill>
-                <a:latin typeface="Times New Roman" pitchFamily="34" charset="0"/>
-                <a:ea typeface="Times New Roman" pitchFamily="34" charset="-122"/>
-                <a:cs typeface="Times New Roman" pitchFamily="34" charset="-120"/>
-              </a:rPr>
-              <a:t>Teacher's Note</a:t>
-            </a:r>
-            <a:endParaRPr lang="en-US" sz="3600" dirty="0"/>
-          </a:p>
-        </p:txBody>
-      </p:sp>
-      <p:sp>
-        <p:nvSpPr>
-          <p:cNvPr id="5" name="Text 2"/>
-          <p:cNvSpPr/>
-          <p:nvPr/>
-        </p:nvSpPr>
-        <p:spPr>
-          <a:xfrm>
-            <a:off x="2697480" y="1783080"/>
-            <a:ext cx="9174175" cy="4663440"/>
-          </a:xfrm>
-          <a:prstGeom prst="rect">
-            <a:avLst/>
-          </a:prstGeom>
-          <a:noFill/>
-          <a:ln/>
-        </p:spPr>
-        <p:txBody>
-          <a:bodyPr wrap="square" lIns="0" tIns="0" rIns="0" bIns="0" rtlCol="0" anchor="t"/>
-          <a:lstStyle/>
-          <a:p>
-            <a:pPr algn="l" marL="342900" indent="-342900">
-              <a:spcAft>
-                <a:spcPts val="800"/>
-              </a:spcAft>
-              <a:buSzPct val="100000"/>
-              <a:buChar char="•"/>
-            </a:pPr>
-            <a:r>
-              <a:rPr lang="en-US" sz="2000" dirty="0">
-                <a:solidFill>
-                  <a:srgbClr val="111111"/>
-                </a:solidFill>
-                <a:latin typeface="Calibri" pitchFamily="34" charset="0"/>
-                <a:ea typeface="Calibri" pitchFamily="34" charset="-122"/>
-                <a:cs typeface="Calibri" pitchFamily="34" charset="-120"/>
-              </a:rPr>
-              <a:t>Timing: Homework correction, plan, objectives 8 min | Recall, situation, action 10 min | 5 activities 30 min | Board summary (copying) 30 min | Evaluation, remediation 10 min | Homework, next lesson 5 min | Logbook 7 min</a:t>
-            </a:r>
-            <a:endParaRPr lang="en-US" sz="2000" dirty="0"/>
-          </a:p>
-          <a:p>
-            <a:pPr algn="l" marL="342900" indent="-342900">
-              <a:spcAft>
-                <a:spcPts val="800"/>
-              </a:spcAft>
-              <a:buSzPct val="100000"/>
-              <a:buChar char="•"/>
-            </a:pPr>
-            <a:r>
-              <a:rPr lang="en-US" sz="2000" dirty="0">
-                <a:solidFill>
-                  <a:srgbClr val="111111"/>
-                </a:solidFill>
-                <a:latin typeface="Calibri" pitchFamily="34" charset="0"/>
-                <a:ea typeface="Calibri" pitchFamily="34" charset="-122"/>
-                <a:cs typeface="Calibri" pitchFamily="34" charset="-120"/>
-              </a:rPr>
-              <a:t>Without the projector (Activity 1): ask learners to describe the Sahara from films or pictures.</a:t>
-            </a:r>
-            <a:endParaRPr lang="en-US" sz="2000" dirty="0"/>
-          </a:p>
-          <a:p>
-            <a:pPr algn="l" marL="342900" indent="-342900">
-              <a:spcAft>
-                <a:spcPts val="800"/>
-              </a:spcAft>
-              <a:buSzPct val="100000"/>
-              <a:buChar char="•"/>
-            </a:pPr>
-            <a:r>
-              <a:rPr lang="en-US" sz="2000" dirty="0">
-                <a:solidFill>
-                  <a:srgbClr val="111111"/>
-                </a:solidFill>
-                <a:latin typeface="Calibri" pitchFamily="34" charset="0"/>
-                <a:ea typeface="Calibri" pitchFamily="34" charset="-122"/>
-                <a:cs typeface="Calibri" pitchFamily="34" charset="-120"/>
-              </a:rPr>
-              <a:t>Without the projector (Activity 2): draw the Equator and the two tropics on the board and place the Sahara.</a:t>
-            </a:r>
-            <a:endParaRPr lang="en-US" sz="2000" dirty="0"/>
-          </a:p>
-          <a:p>
-            <a:pPr algn="l" marL="342900" indent="-342900">
-              <a:spcAft>
-                <a:spcPts val="800"/>
-              </a:spcAft>
-              <a:buSzPct val="100000"/>
-              <a:buChar char="•"/>
-            </a:pPr>
-            <a:r>
-              <a:rPr lang="en-US" sz="2000" dirty="0">
-                <a:solidFill>
-                  <a:srgbClr val="111111"/>
-                </a:solidFill>
-                <a:latin typeface="Calibri" pitchFamily="34" charset="0"/>
-                <a:ea typeface="Calibri" pitchFamily="34" charset="-122"/>
-                <a:cs typeface="Calibri" pitchFamily="34" charset="-120"/>
-              </a:rPr>
-              <a:t>Without the projector (Activity 3): show a handful of sand and a handful of gravel.</a:t>
-            </a:r>
-            <a:endParaRPr lang="en-US" sz="2000" dirty="0"/>
-          </a:p>
-          <a:p>
-            <a:pPr algn="l" marL="342900" indent="-342900">
-              <a:spcAft>
-                <a:spcPts val="800"/>
-              </a:spcAft>
-              <a:buSzPct val="100000"/>
-              <a:buChar char="•"/>
-            </a:pPr>
-            <a:r>
-              <a:rPr lang="en-US" sz="2000" dirty="0">
-                <a:solidFill>
-                  <a:srgbClr val="111111"/>
-                </a:solidFill>
-                <a:latin typeface="Calibri" pitchFamily="34" charset="0"/>
-                <a:ea typeface="Calibri" pitchFamily="34" charset="-122"/>
-                <a:cs typeface="Calibri" pitchFamily="34" charset="-120"/>
-              </a:rPr>
-              <a:t>Without the projector (Activity 4): describe the rocky hills of the Sahara (Hoggar, Tibesti).</a:t>
-            </a:r>
-            <a:endParaRPr lang="en-US" sz="2000" dirty="0"/>
-          </a:p>
-          <a:p>
-            <a:pPr algn="l" marL="342900" indent="-342900">
-              <a:spcAft>
-                <a:spcPts val="800"/>
-              </a:spcAft>
-              <a:buSzPct val="100000"/>
-              <a:buChar char="•"/>
-            </a:pPr>
-            <a:r>
-              <a:rPr lang="en-US" sz="2000" dirty="0">
-                <a:solidFill>
-                  <a:srgbClr val="111111"/>
-                </a:solidFill>
-                <a:latin typeface="Calibri" pitchFamily="34" charset="0"/>
-                <a:ea typeface="Calibri" pitchFamily="34" charset="-122"/>
-                <a:cs typeface="Calibri" pitchFamily="34" charset="-120"/>
-              </a:rPr>
-              <a:t>Without the projector (Activity 5): remind learners that the Harmattan is dry because it comes from the Sahara.</a:t>
-            </a:r>
-            <a:endParaRPr lang="en-US" sz="2000" dirty="0"/>
-          </a:p>
-        </p:txBody>
-      </p:sp>
-      <p:sp>
-        <p:nvSpPr>
-          <p:cNvPr id="25" name="Slide Number Placeholder 0"/>
-          <p:cNvSpPr>
-            <a:spLocks noGrp="1"/>
-          </p:cNvSpPr>
-          <p:nvPr>
-            <p:ph type="sldNum" sz="quarter" idx="4294967295"/>
-          </p:nvPr>
-        </p:nvSpPr>
-        <p:spPr>
-          <a:xfrm>
-            <a:off x="27432" y="91440"/>
-            <a:ext cx="585216" cy="475488"/>
-          </a:xfrm>
-          <a:prstGeom prst="rect">
-            <a:avLst/>
-          </a:prstGeom>
-          <a:extLst>
-            <a:ext uri="{C572A759-6A51-4108-AA02-DFA0A04FC94B}">
-              <ma14:wrappingTextBoxFlag xmlns:ma14="http://schemas.microsoft.com/office/mac/drawingml/2011/main" val="0"/>
-            </a:ext>
-          </a:extLst>
-        </p:spPr>
-        <p:txBody>
-          <a:bodyPr/>
-          <a:lstStyle>
-            <a:lvl1pPr>
-              <a:defRPr sz="2000">
-                <a:solidFill>
-                  <a:srgbClr val="FFFFFF"/>
-                </a:solidFill>
-                <a:latin typeface="Calibri"/>
-                <a:ea typeface="Calibri"/>
-                <a:cs typeface="Calibri"/>
-              </a:defRPr>
-            </a:lvl1pPr>
-          </a:lstStyle>
-          <a:p>
-            <a:pPr algn="ctr"/>
-            <a:fld id="{F7021451-1387-4CA6-816F-3879F97B5CBC}" type="slidenum">
-              <a:rPr b="1" lang="en-US"/>
               <a:t>53</a:t>
             </a:fld>
             <a:endParaRPr lang="en-US"/>
@@ -21347,7 +21436,7 @@
                 <a:ea typeface="Calibri" pitchFamily="34" charset="-122"/>
                 <a:cs typeface="Calibri" pitchFamily="34" charset="-120"/>
               </a:rPr>
-              <a:t>REFERENCES</a:t>
+              <a:t>TEACHER'S NOTE</a:t>
             </a:r>
             <a:endParaRPr lang="en-US" sz="1400" dirty="0"/>
           </a:p>
@@ -21412,7 +21501,7 @@
                 <a:ea typeface="Times New Roman" pitchFamily="34" charset="-122"/>
                 <a:cs typeface="Times New Roman" pitchFamily="34" charset="-120"/>
               </a:rPr>
-              <a:t>References</a:t>
+              <a:t>Teacher's Note</a:t>
             </a:r>
             <a:endParaRPr lang="en-US" sz="3600" dirty="0"/>
           </a:p>
@@ -21447,7 +21536,7 @@
               <a:buChar char="•"/>
             </a:pPr>
             <a:r>
-              <a:rPr lang="en-US" sz="1800" dirty="0">
+              <a:rPr lang="en-US" sz="2000" dirty="0">
                 <a:solidFill>
                   <a:srgbClr val="111111"/>
                 </a:solidFill>
@@ -21455,9 +21544,9 @@
                 <a:ea typeface="Calibri" pitchFamily="34" charset="-122"/>
                 <a:cs typeface="Calibri" pitchFamily="34" charset="-120"/>
               </a:rPr>
-              <a:t>Harmonised Progression Sheet, Economic Geography (5051), Form 2.</a:t>
-            </a:r>
-            <a:endParaRPr lang="en-US" sz="1800" dirty="0"/>
+              <a:t>Timing: Homework correction, plan, objectives 8 min | Recall, situation, action 10 min | 5 activities 30 min | Board summary (copying) 30 min | Evaluation, remediation 10 min | Homework, next lesson 5 min | Logbook 7 min</a:t>
+            </a:r>
+            <a:endParaRPr lang="en-US" sz="2000" dirty="0"/>
           </a:p>
           <a:p>
             <a:pPr algn="l" marL="342900" indent="-342900">
@@ -21468,7 +21557,7 @@
               <a:buChar char="•"/>
             </a:pPr>
             <a:r>
-              <a:rPr lang="en-US" sz="1800" dirty="0">
+              <a:rPr lang="en-US" sz="2000" dirty="0">
                 <a:solidFill>
                   <a:srgbClr val="111111"/>
                 </a:solidFill>
@@ -21476,9 +21565,9 @@
                 <a:ea typeface="Calibri" pitchFamily="34" charset="-122"/>
                 <a:cs typeface="Calibri" pitchFamily="34" charset="-120"/>
               </a:rPr>
-              <a:t>Class textbook: The major biomes of the world (hot deserts).</a:t>
-            </a:r>
-            <a:endParaRPr lang="en-US" sz="1800" dirty="0"/>
+              <a:t>Without the projector (Activity 1): draw the tropics on the board.</a:t>
+            </a:r>
+            <a:endParaRPr lang="en-US" sz="2000" dirty="0"/>
           </a:p>
           <a:p>
             <a:pPr algn="l" marL="342900" indent="-342900">
@@ -21489,7 +21578,7 @@
               <a:buChar char="•"/>
             </a:pPr>
             <a:r>
-              <a:rPr lang="en-US" sz="1800" dirty="0">
+              <a:rPr lang="en-US" sz="2000" dirty="0">
                 <a:solidFill>
                   <a:srgbClr val="111111"/>
                 </a:solidFill>
@@ -21497,9 +21586,9 @@
                 <a:ea typeface="Calibri" pitchFamily="34" charset="-122"/>
                 <a:cs typeface="Calibri" pitchFamily="34" charset="-120"/>
               </a:rPr>
-              <a:t>Photo, Activity 1: “Desert trekking in Merzouga” by Antonio Cinotti , CC BY-NC-ND 2.0, via Flickr (https://www.flickr.com/photos/46378751@N02/15331399979)</a:t>
-            </a:r>
-            <a:endParaRPr lang="en-US" sz="1800" dirty="0"/>
+              <a:t>Without the projector (Activity 2): describe sand dunes.</a:t>
+            </a:r>
+            <a:endParaRPr lang="en-US" sz="2000" dirty="0"/>
           </a:p>
           <a:p>
             <a:pPr algn="l" marL="342900" indent="-342900">
@@ -21510,7 +21599,7 @@
               <a:buChar char="•"/>
             </a:pPr>
             <a:r>
-              <a:rPr lang="en-US" sz="1800" dirty="0">
+              <a:rPr lang="en-US" sz="2000" dirty="0">
                 <a:solidFill>
                   <a:srgbClr val="111111"/>
                 </a:solidFill>
@@ -21518,9 +21607,9 @@
                 <a:ea typeface="Calibri" pitchFamily="34" charset="-122"/>
                 <a:cs typeface="Calibri" pitchFamily="34" charset="-120"/>
               </a:rPr>
-              <a:t>Photo, Activity 3: “Libya 88” by motohakone, CC BY-NC-SA 2.0, via Flickr (https://www.flickr.com/photos/134157242@N08/42853720391)</a:t>
-            </a:r>
-            <a:endParaRPr lang="en-US" sz="1800" dirty="0"/>
+              <a:t>Without the projector (Activity 3): show a handful of gravel.</a:t>
+            </a:r>
+            <a:endParaRPr lang="en-US" sz="2000" dirty="0"/>
           </a:p>
           <a:p>
             <a:pPr algn="l" marL="342900" indent="-342900">
@@ -21531,7 +21620,7 @@
               <a:buChar char="•"/>
             </a:pPr>
             <a:r>
-              <a:rPr lang="en-US" sz="1800" dirty="0">
+              <a:rPr lang="en-US" sz="2000" dirty="0">
                 <a:solidFill>
                   <a:srgbClr val="111111"/>
                 </a:solidFill>
@@ -21539,9 +21628,9 @@
                 <a:ea typeface="Calibri" pitchFamily="34" charset="-122"/>
                 <a:cs typeface="Calibri" pitchFamily="34" charset="-120"/>
               </a:rPr>
-              <a:t>Photo, Activity 4: “FR 525 on way to Loy Canyon - Sedona” by Al_HikesAZ, CC BY-NC 2.0, via Flickr (https://www.flickr.com/photos/7202153@N03/7200183096)</a:t>
-            </a:r>
-            <a:endParaRPr lang="en-US" sz="1800" dirty="0"/>
+              <a:t>Without the projector (Activity 4): describe bare rock.</a:t>
+            </a:r>
+            <a:endParaRPr lang="en-US" sz="2000" dirty="0"/>
           </a:p>
           <a:p>
             <a:pPr algn="l" marL="342900" indent="-342900">
@@ -21552,7 +21641,7 @@
               <a:buChar char="•"/>
             </a:pPr>
             <a:r>
-              <a:rPr lang="en-US" sz="1800" dirty="0">
+              <a:rPr lang="en-US" sz="2000" dirty="0">
                 <a:solidFill>
                   <a:srgbClr val="111111"/>
                 </a:solidFill>
@@ -21560,9 +21649,9 @@
                 <a:ea typeface="Calibri" pitchFamily="34" charset="-122"/>
                 <a:cs typeface="Calibri" pitchFamily="34" charset="-120"/>
               </a:rPr>
-              <a:t>Diagrams and animations: drawn for this lesson (Geography Department).</a:t>
-            </a:r>
-            <a:endParaRPr lang="en-US" sz="1800" dirty="0"/>
+              <a:t>Without the projector (Activity 5): describe the Harmattan.</a:t>
+            </a:r>
+            <a:endParaRPr lang="en-US" sz="2000" dirty="0"/>
           </a:p>
         </p:txBody>
       </p:sp>
@@ -21609,6 +21698,331 @@
             <a:fld id="{F7021451-1387-4CA6-816F-3879F97B5CBC}" type="slidenum">
               <a:rPr b="1" lang="en-US"/>
               <a:t>54</a:t>
+            </a:fld>
+            <a:endParaRPr lang="en-US"/>
+          </a:p>
+        </p:txBody>
+      </p:sp>
+    </p:spTree>
+  </p:cSld>
+  <p:clrMapOvr>
+    <a:masterClrMapping/>
+  </p:clrMapOvr>
+</p:sld>
+</file>
+
+<file path=ppt/slides/slide55.xml><?xml version="1.0" encoding="utf-8"?>
+<p:sld xmlns:a="http://schemas.openxmlformats.org/drawingml/2006/main" xmlns:r="http://schemas.openxmlformats.org/officeDocument/2006/relationships" xmlns:p="http://schemas.openxmlformats.org/presentationml/2006/main">
+  <p:cSld name="Slide 55">
+    <p:spTree>
+      <p:nvGrpSpPr>
+        <p:cNvPr id="1" name=""/>
+        <p:cNvGrpSpPr/>
+        <p:nvPr/>
+      </p:nvGrpSpPr>
+      <p:grpSpPr>
+        <a:xfrm>
+          <a:off x="0" y="0"/>
+          <a:ext cx="0" cy="0"/>
+          <a:chOff x="0" y="0"/>
+          <a:chExt cx="0" cy="0"/>
+        </a:xfrm>
+      </p:grpSpPr>
+      <p:sp>
+        <p:nvSpPr>
+          <p:cNvPr id="2" name="Text 0"/>
+          <p:cNvSpPr/>
+          <p:nvPr/>
+        </p:nvSpPr>
+        <p:spPr>
+          <a:xfrm>
+            <a:off x="457200" y="713232"/>
+            <a:ext cx="11368735" cy="274320"/>
+          </a:xfrm>
+          <a:prstGeom prst="rect">
+            <a:avLst/>
+          </a:prstGeom>
+          <a:noFill/>
+          <a:ln/>
+        </p:spPr>
+        <p:txBody>
+          <a:bodyPr wrap="square" lIns="0" tIns="0" rIns="0" bIns="0" rtlCol="0" anchor="ctr"/>
+          <a:lstStyle/>
+          <a:p>
+            <a:pPr algn="r" indent="0" marL="0">
+              <a:buNone/>
+            </a:pPr>
+            <a:r>
+              <a:rPr lang="en-US" sz="1400" b="1" dirty="0">
+                <a:solidFill>
+                  <a:srgbClr val="1C3F6E"/>
+                </a:solidFill>
+                <a:latin typeface="Calibri" pitchFamily="34" charset="0"/>
+                <a:ea typeface="Calibri" pitchFamily="34" charset="-122"/>
+                <a:cs typeface="Calibri" pitchFamily="34" charset="-120"/>
+              </a:rPr>
+              <a:t>REFERENCES</a:t>
+            </a:r>
+            <a:endParaRPr lang="en-US" sz="1400" dirty="0"/>
+          </a:p>
+        </p:txBody>
+      </p:sp>
+      <p:pic>
+        <p:nvPicPr>
+          <p:cNvPr id="3" name="Image 0" descr="/home/claude/f4/img/minesec_sheet.png">    </p:cNvPr>
+          <p:cNvPicPr>
+            <a:picLocks noChangeAspect="1"/>
+          </p:cNvPicPr>
+          <p:nvPr/>
+        </p:nvPicPr>
+        <p:blipFill>
+          <a:blip r:embed="rId1"/>
+          <a:stretch>
+            <a:fillRect/>
+          </a:stretch>
+        </p:blipFill>
+        <p:spPr>
+          <a:xfrm>
+            <a:off x="0" y="658368"/>
+            <a:ext cx="3840480" cy="5833872"/>
+          </a:xfrm>
+          <a:prstGeom prst="rect">
+            <a:avLst/>
+          </a:prstGeom>
+        </p:spPr>
+      </p:pic>
+      <p:sp>
+        <p:nvSpPr>
+          <p:cNvPr id="4" name="Text 1"/>
+          <p:cNvSpPr/>
+          <p:nvPr/>
+        </p:nvSpPr>
+        <p:spPr>
+          <a:xfrm>
+            <a:off x="4069080" y="1005840"/>
+            <a:ext cx="7802575" cy="731520"/>
+          </a:xfrm>
+          <a:prstGeom prst="rect">
+            <a:avLst/>
+          </a:prstGeom>
+          <a:noFill/>
+          <a:ln/>
+        </p:spPr>
+        <p:txBody>
+          <a:bodyPr wrap="square" lIns="0" tIns="0" rIns="0" bIns="0" rtlCol="0" anchor="ctr">
+            <a:normAutofit/>
+          </a:bodyPr>
+          <a:lstStyle/>
+          <a:p>
+            <a:pPr algn="ctr" indent="0" marL="0">
+              <a:buNone/>
+            </a:pPr>
+            <a:r>
+              <a:rPr lang="en-US" sz="3600" b="1" dirty="0">
+                <a:solidFill>
+                  <a:srgbClr val="990011"/>
+                </a:solidFill>
+                <a:latin typeface="Times New Roman" pitchFamily="34" charset="0"/>
+                <a:ea typeface="Times New Roman" pitchFamily="34" charset="-122"/>
+                <a:cs typeface="Times New Roman" pitchFamily="34" charset="-120"/>
+              </a:rPr>
+              <a:t>References</a:t>
+            </a:r>
+            <a:endParaRPr lang="en-US" sz="3600" dirty="0"/>
+          </a:p>
+        </p:txBody>
+      </p:sp>
+      <p:sp>
+        <p:nvSpPr>
+          <p:cNvPr id="5" name="Text 2"/>
+          <p:cNvSpPr/>
+          <p:nvPr/>
+        </p:nvSpPr>
+        <p:spPr>
+          <a:xfrm>
+            <a:off x="4069080" y="1783080"/>
+            <a:ext cx="7802575" cy="4663440"/>
+          </a:xfrm>
+          <a:prstGeom prst="rect">
+            <a:avLst/>
+          </a:prstGeom>
+          <a:noFill/>
+          <a:ln/>
+        </p:spPr>
+        <p:txBody>
+          <a:bodyPr wrap="square" lIns="0" tIns="0" rIns="0" bIns="0" rtlCol="0" anchor="t"/>
+          <a:lstStyle/>
+          <a:p>
+            <a:pPr algn="l" marL="342900" indent="-342900">
+              <a:spcAft>
+                <a:spcPts val="800"/>
+              </a:spcAft>
+              <a:buSzPct val="100000"/>
+              <a:buChar char="•"/>
+            </a:pPr>
+            <a:r>
+              <a:rPr lang="en-US" sz="1800" dirty="0">
+                <a:solidFill>
+                  <a:srgbClr val="111111"/>
+                </a:solidFill>
+                <a:latin typeface="Calibri" pitchFamily="34" charset="0"/>
+                <a:ea typeface="Calibri" pitchFamily="34" charset="-122"/>
+                <a:cs typeface="Calibri" pitchFamily="34" charset="-120"/>
+              </a:rPr>
+              <a:t>Harmonised Progression Sheet, Economic Geography (5051), Form 2.</a:t>
+            </a:r>
+            <a:endParaRPr lang="en-US" sz="1800" dirty="0"/>
+          </a:p>
+          <a:p>
+            <a:pPr algn="l" marL="342900" indent="-342900">
+              <a:spcAft>
+                <a:spcPts val="800"/>
+              </a:spcAft>
+              <a:buSzPct val="100000"/>
+              <a:buChar char="•"/>
+            </a:pPr>
+            <a:r>
+              <a:rPr lang="en-US" sz="1800" dirty="0">
+                <a:solidFill>
+                  <a:srgbClr val="111111"/>
+                </a:solidFill>
+                <a:latin typeface="Calibri" pitchFamily="34" charset="0"/>
+                <a:ea typeface="Calibri" pitchFamily="34" charset="-122"/>
+                <a:cs typeface="Calibri" pitchFamily="34" charset="-120"/>
+              </a:rPr>
+              <a:t>Class textbook: The major biomes of the world (hot deserts).</a:t>
+            </a:r>
+            <a:endParaRPr lang="en-US" sz="1800" dirty="0"/>
+          </a:p>
+          <a:p>
+            <a:pPr algn="l" marL="342900" indent="-342900">
+              <a:spcAft>
+                <a:spcPts val="800"/>
+              </a:spcAft>
+              <a:buSzPct val="100000"/>
+              <a:buChar char="•"/>
+            </a:pPr>
+            <a:r>
+              <a:rPr lang="en-US" sz="1800" dirty="0">
+                <a:solidFill>
+                  <a:srgbClr val="111111"/>
+                </a:solidFill>
+                <a:latin typeface="Calibri" pitchFamily="34" charset="0"/>
+                <a:ea typeface="Calibri" pitchFamily="34" charset="-122"/>
+                <a:cs typeface="Calibri" pitchFamily="34" charset="-120"/>
+              </a:rPr>
+              <a:t>Photo, Activity 2: “Desert trekking in Merzouga” by Antonio Cinotti , CC BY-NC-ND 2.0, via Flickr (https://www.flickr.com/photos/46378751@N02/15331399979)</a:t>
+            </a:r>
+            <a:endParaRPr lang="en-US" sz="1800" dirty="0"/>
+          </a:p>
+          <a:p>
+            <a:pPr algn="l" marL="342900" indent="-342900">
+              <a:spcAft>
+                <a:spcPts val="800"/>
+              </a:spcAft>
+              <a:buSzPct val="100000"/>
+              <a:buChar char="•"/>
+            </a:pPr>
+            <a:r>
+              <a:rPr lang="en-US" sz="1800" dirty="0">
+                <a:solidFill>
+                  <a:srgbClr val="111111"/>
+                </a:solidFill>
+                <a:latin typeface="Calibri" pitchFamily="34" charset="0"/>
+                <a:ea typeface="Calibri" pitchFamily="34" charset="-122"/>
+                <a:cs typeface="Calibri" pitchFamily="34" charset="-120"/>
+              </a:rPr>
+              <a:t>Photo, Activity 3: “Libya 88” by motohakone, CC BY-NC-SA 2.0, via Flickr (https://www.flickr.com/photos/134157242@N08/42853720391)</a:t>
+            </a:r>
+            <a:endParaRPr lang="en-US" sz="1800" dirty="0"/>
+          </a:p>
+          <a:p>
+            <a:pPr algn="l" marL="342900" indent="-342900">
+              <a:spcAft>
+                <a:spcPts val="800"/>
+              </a:spcAft>
+              <a:buSzPct val="100000"/>
+              <a:buChar char="•"/>
+            </a:pPr>
+            <a:r>
+              <a:rPr lang="en-US" sz="1800" dirty="0">
+                <a:solidFill>
+                  <a:srgbClr val="111111"/>
+                </a:solidFill>
+                <a:latin typeface="Calibri" pitchFamily="34" charset="0"/>
+                <a:ea typeface="Calibri" pitchFamily="34" charset="-122"/>
+                <a:cs typeface="Calibri" pitchFamily="34" charset="-120"/>
+              </a:rPr>
+              <a:t>Photo, Activity 4: “FR 525 on way to Loy Canyon - Sedona” by Al_HikesAZ, CC BY-NC 2.0, via Flickr (https://www.flickr.com/photos/7202153@N03/7200183096)</a:t>
+            </a:r>
+            <a:endParaRPr lang="en-US" sz="1800" dirty="0"/>
+          </a:p>
+          <a:p>
+            <a:pPr algn="l" marL="342900" indent="-342900">
+              <a:spcAft>
+                <a:spcPts val="800"/>
+              </a:spcAft>
+              <a:buSzPct val="100000"/>
+              <a:buChar char="•"/>
+            </a:pPr>
+            <a:r>
+              <a:rPr lang="en-US" sz="1800" dirty="0">
+                <a:solidFill>
+                  <a:srgbClr val="111111"/>
+                </a:solidFill>
+                <a:latin typeface="Calibri" pitchFamily="34" charset="0"/>
+                <a:ea typeface="Calibri" pitchFamily="34" charset="-122"/>
+                <a:cs typeface="Calibri" pitchFamily="34" charset="-120"/>
+              </a:rPr>
+              <a:t>Diagrams and animations: drawn for this lesson (Geography Department).</a:t>
+            </a:r>
+            <a:endParaRPr lang="en-US" sz="1800" dirty="0"/>
+          </a:p>
+        </p:txBody>
+      </p:sp>
+      <p:sp>
+        <p:nvSpPr>
+          <p:cNvPr id="25" name="Slide Number Placeholder 0"/>
+          <p:cNvSpPr>
+            <a:spLocks noGrp="1"/>
+          </p:cNvSpPr>
+          <p:nvPr>
+            <p:ph type="sldNum" sz="quarter" idx="4294967295"/>
+          </p:nvPr>
+        </p:nvSpPr>
+        <p:spPr>
+          <a:xfrm>
+            <a:off x="27432" y="91440"/>
+            <a:ext cx="585216" cy="475488"/>
+          </a:xfrm>
+          <a:prstGeom prst="rect">
+            <a:avLst/>
+          </a:prstGeom>
+          <a:extLst>
+            <a:ext uri="{C572A759-6A51-4108-AA02-DFA0A04FC94B}">
+              <ma14:wrappingTextBoxFlag xmlns:ma14="http://schemas.microsoft.com/office/mac/drawingml/2011/main" val="0"/>
+            </a:ext>
+          </a:extLst>
+        </p:spPr>
+        <p:txBody>
+          <a:bodyPr/>
+          <a:lstStyle>
+            <a:lvl1pPr>
+              <a:defRPr sz="2000">
+                <a:solidFill>
+                  <a:srgbClr val="FFFFFF"/>
+                </a:solidFill>
+                <a:latin typeface="Calibri"/>
+                <a:ea typeface="Calibri"/>
+                <a:cs typeface="Calibri"/>
+              </a:defRPr>
+            </a:lvl1pPr>
+          </a:lstStyle>
+          <a:p>
+            <a:pPr algn="ctr"/>
+            <a:fld id="{F7021451-1387-4CA6-816F-3879F97B5CBC}" type="slidenum">
+              <a:rPr b="1" lang="en-US"/>
+              <a:t>55</a:t>
             </a:fld>
             <a:endParaRPr lang="en-US"/>
           </a:p>

--- a/lecons/F2T/11_S05_L3_P1_Desert_Location_Types.pptx
+++ b/lecons/F2T/11_S05_L3_P1_Desert_Location_Types.pptx
@@ -3460,7 +3460,7 @@
           <a:p>
             <a:r>
               <a:rPr lang="en-US" dirty="0"/>
-              <a:t>Before we start the new lesson, let us correct the homework I gave you at the end of Lesson 2 (Part 5): The Tropical Grassland Region: Problems Faced and Attempted Solutions. The question was: On a map of Africa in your atlas, find the Sahara Desert. Write the names of three countries that it covers. Take out your exercise books.</a:t>
+              <a:t>Before we start the new lesson, let us correct the homework I gave you at the end of Lesson 2 (Part 5): The Tropical Grassland Region: Problems Faced and Attempted Solutions. The question was: Define a desert. Take out your exercise books.</a:t>
             </a:r>
             <a:endParaRPr lang="en-US" dirty="0"/>
           </a:p>
@@ -4340,7 +4340,7 @@
           <a:p>
             <a:r>
               <a:rPr lang="en-US" dirty="0"/>
-              <a:t>For your homework: Think about the hottest days of March in Garoua. Are the nights also very hot, or cooler? Write two sentences about the difference between day and night. We shall correct it at the beginning of our next lesson.</a:t>
+              <a:t>For your homework: Explain why desert nights are cold. We shall correct it at the beginning of our next lesson.</a:t>
             </a:r>
             <a:endParaRPr lang="en-US" dirty="0"/>
           </a:p>
@@ -4428,7 +4428,7 @@
           <a:p>
             <a:r>
               <a:rPr lang="en-US" dirty="0"/>
-              <a:t>Here is a good answer. The Sahara covers countries such as Algeria, Libya, Egypt, Niger, Mali and Chad. Compare it with your own answer and correct your work in red.</a:t>
+              <a:t>Here is a good answer. It is a region that receives less than 250 mm of rain per year. Compare it with your own answer and correct your work in red.</a:t>
             </a:r>
             <a:endParaRPr lang="en-US" dirty="0"/>
           </a:p>
@@ -15227,7 +15227,7 @@
         <p:spPr>
           <a:xfrm>
             <a:off x="0" y="658368"/>
-            <a:ext cx="2468880" cy="5833872"/>
+            <a:ext cx="5120640" cy="5833872"/>
           </a:xfrm>
           <a:prstGeom prst="rect">
             <a:avLst/>
@@ -15242,8 +15242,8 @@
         </p:nvSpPr>
         <p:spPr>
           <a:xfrm>
-            <a:off x="2697480" y="1005840"/>
-            <a:ext cx="9174175" cy="731520"/>
+            <a:off x="5349240" y="1005840"/>
+            <a:ext cx="6522415" cy="731520"/>
           </a:xfrm>
           <a:prstGeom prst="rect">
             <a:avLst/>
@@ -15283,8 +15283,8 @@
         </p:nvSpPr>
         <p:spPr>
           <a:xfrm>
-            <a:off x="2697480" y="1783080"/>
-            <a:ext cx="9174175" cy="4663440"/>
+            <a:off x="5349240" y="1783080"/>
+            <a:ext cx="6522415" cy="4663440"/>
           </a:xfrm>
           <a:prstGeom prst="rect">
             <a:avLst/>
@@ -15331,7 +15331,7 @@
                 <a:ea typeface="Times New Roman" pitchFamily="34" charset="-122"/>
                 <a:cs typeface="Times New Roman" pitchFamily="34" charset="-120"/>
               </a:rPr>
-              <a:t>On a map of Africa in your atlas, find the Sahara Desert. Write the names of three countries that it covers.</a:t>
+              <a:t>Define a desert.</a:t>
             </a:r>
             <a:endParaRPr lang="en-US" sz="4000" dirty="0"/>
           </a:p>
@@ -17839,7 +17839,7 @@
                 <a:ea typeface="Times New Roman" pitchFamily="34" charset="-122"/>
                 <a:cs typeface="Times New Roman" pitchFamily="34" charset="-120"/>
               </a:rPr>
-              <a:t>Think about the hottest days of March in Garoua. Are the nights also very hot, or cooler? Write two sentences about the difference between day and night.</a:t>
+              <a:t>Explain why desert nights are cold.</a:t>
             </a:r>
             <a:endParaRPr lang="en-US" sz="4000" dirty="0"/>
           </a:p>
@@ -18058,7 +18058,7 @@
                 <a:ea typeface="Times New Roman" pitchFamily="34" charset="-122"/>
                 <a:cs typeface="Times New Roman" pitchFamily="34" charset="-120"/>
               </a:rPr>
-              <a:t>The Sahara covers countries such as Algeria, Libya, Egypt, Niger, Mali and Chad.</a:t>
+              <a:t>It is a region that receives less than 250 mm of rain per year.</a:t>
             </a:r>
             <a:endParaRPr lang="en-US" sz="4000" dirty="0"/>
           </a:p>
@@ -20998,7 +20998,7 @@
                           <a:ea typeface="Calibri" pitchFamily="34" charset="-122"/>
                           <a:cs typeface="Calibri" pitchFamily="34" charset="-120"/>
                         </a:rPr>
-                        <a:t>Think about the hottest days of March in Garoua. Are the nights also very hot, or cooler? Write two sentences about the difference between day and night.</a:t>
+                        <a:t>Explain why desert nights are cold.</a:t>
                       </a:r>
                       <a:endParaRPr lang="en-US" sz="1600" dirty="0">
                         <a:latin typeface="Calibri" charset="0"/>
